--- a/docs/academic/TeslimEdilecekler/Sunumlar/AURIS_Tum_Sunumlar_Birlesik.pptx
+++ b/docs/academic/TeslimEdilecekler/Sunumlar/AURIS_Tum_Sunumlar_Birlesik.pptx
@@ -4684,7 +4684,7 @@
         <p:spPr>
           <a:xfrm>
             <a:off x="365760" y="6473952"/>
-            <a:ext cx="7772400" cy="292608"/>
+            <a:ext cx="4206240" cy="292608"/>
           </a:xfrm>
           <a:prstGeom prst="rect">
             <a:avLst/>
@@ -4705,7 +4705,7 @@
                 </a:solidFill>
                 <a:latin typeface="Calibri"/>
               </a:rPr>
-              <a:t>AURIS  ·  Yapay Zekâ Üretimli Müzik Tespiti</a:t>
+              <a:t>AURIS · YZ Üretimli Müzik Tespiti</a:t>
             </a:r>
           </a:p>
         </p:txBody>
@@ -4718,8 +4718,8 @@
         </p:nvSpPr>
         <p:spPr>
           <a:xfrm>
-            <a:off x="5029200" y="6473952"/>
-            <a:ext cx="6793992" cy="292608"/>
+            <a:off x="4663440" y="6473952"/>
+            <a:ext cx="7159752" cy="292608"/>
           </a:xfrm>
           <a:prstGeom prst="rect">
             <a:avLst/>
@@ -6256,7 +6256,7 @@
         <p:spPr>
           <a:xfrm>
             <a:off x="365760" y="6473952"/>
-            <a:ext cx="7772400" cy="292608"/>
+            <a:ext cx="4206240" cy="292608"/>
           </a:xfrm>
           <a:prstGeom prst="rect">
             <a:avLst/>
@@ -6277,7 +6277,7 @@
                 </a:solidFill>
                 <a:latin typeface="Calibri"/>
               </a:rPr>
-              <a:t>AURIS  ·  Yapay Zekâ Üretimli Müzik Tespiti</a:t>
+              <a:t>AURIS · YZ Üretimli Müzik Tespiti</a:t>
             </a:r>
           </a:p>
         </p:txBody>
@@ -6290,8 +6290,8 @@
         </p:nvSpPr>
         <p:spPr>
           <a:xfrm>
-            <a:off x="5029200" y="6473952"/>
-            <a:ext cx="6793992" cy="292608"/>
+            <a:off x="4663440" y="6473952"/>
+            <a:ext cx="7159752" cy="292608"/>
           </a:xfrm>
           <a:prstGeom prst="rect">
             <a:avLst/>
@@ -7954,7 +7954,7 @@
         <p:spPr>
           <a:xfrm>
             <a:off x="365760" y="6473952"/>
-            <a:ext cx="7772400" cy="292608"/>
+            <a:ext cx="4206240" cy="292608"/>
           </a:xfrm>
           <a:prstGeom prst="rect">
             <a:avLst/>
@@ -7975,7 +7975,7 @@
                 </a:solidFill>
                 <a:latin typeface="Calibri"/>
               </a:rPr>
-              <a:t>AURIS  ·  Yapay Zekâ Üretimli Müzik Tespiti</a:t>
+              <a:t>AURIS · YZ Üretimli Müzik Tespiti</a:t>
             </a:r>
           </a:p>
         </p:txBody>
@@ -7988,8 +7988,8 @@
         </p:nvSpPr>
         <p:spPr>
           <a:xfrm>
-            <a:off x="5029200" y="6473952"/>
-            <a:ext cx="6793992" cy="292608"/>
+            <a:off x="4663440" y="6473952"/>
+            <a:ext cx="7159752" cy="292608"/>
           </a:xfrm>
           <a:prstGeom prst="rect">
             <a:avLst/>
@@ -8585,7 +8585,7 @@
         <p:spPr>
           <a:xfrm>
             <a:off x="365760" y="6473952"/>
-            <a:ext cx="7772400" cy="292608"/>
+            <a:ext cx="4206240" cy="292608"/>
           </a:xfrm>
           <a:prstGeom prst="rect">
             <a:avLst/>
@@ -8606,7 +8606,7 @@
                 </a:solidFill>
                 <a:latin typeface="Calibri"/>
               </a:rPr>
-              <a:t>AURIS  ·  Yapay Zekâ Üretimli Müzik Tespiti</a:t>
+              <a:t>AURIS · YZ Üretimli Müzik Tespiti</a:t>
             </a:r>
           </a:p>
         </p:txBody>
@@ -8619,8 +8619,8 @@
         </p:nvSpPr>
         <p:spPr>
           <a:xfrm>
-            <a:off x="5029200" y="6473952"/>
-            <a:ext cx="6793992" cy="292608"/>
+            <a:off x="4663440" y="6473952"/>
+            <a:ext cx="7159752" cy="292608"/>
           </a:xfrm>
           <a:prstGeom prst="rect">
             <a:avLst/>
@@ -11811,7 +11811,7 @@
         <p:spPr>
           <a:xfrm>
             <a:off x="365760" y="6473952"/>
-            <a:ext cx="7772400" cy="292608"/>
+            <a:ext cx="4206240" cy="292608"/>
           </a:xfrm>
           <a:prstGeom prst="rect">
             <a:avLst/>
@@ -11832,7 +11832,7 @@
                 </a:solidFill>
                 <a:latin typeface="Calibri"/>
               </a:rPr>
-              <a:t>AURIS  ·  Yapay Zekâ Üretimli Müzik Tespiti</a:t>
+              <a:t>AURIS · YZ Üretimli Müzik Tespiti</a:t>
             </a:r>
           </a:p>
         </p:txBody>
@@ -11845,8 +11845,8 @@
         </p:nvSpPr>
         <p:spPr>
           <a:xfrm>
-            <a:off x="5029200" y="6473952"/>
-            <a:ext cx="6793992" cy="292608"/>
+            <a:off x="4663440" y="6473952"/>
+            <a:ext cx="7159752" cy="292608"/>
           </a:xfrm>
           <a:prstGeom prst="rect">
             <a:avLst/>
@@ -13707,7 +13707,7 @@
         <p:spPr>
           <a:xfrm>
             <a:off x="365760" y="6473952"/>
-            <a:ext cx="7772400" cy="292608"/>
+            <a:ext cx="4206240" cy="292608"/>
           </a:xfrm>
           <a:prstGeom prst="rect">
             <a:avLst/>
@@ -13728,7 +13728,7 @@
                 </a:solidFill>
                 <a:latin typeface="Calibri"/>
               </a:rPr>
-              <a:t>AURIS  ·  Yapay Zekâ Üretimli Müzik Tespiti</a:t>
+              <a:t>AURIS · YZ Üretimli Müzik Tespiti</a:t>
             </a:r>
           </a:p>
         </p:txBody>
@@ -13741,8 +13741,8 @@
         </p:nvSpPr>
         <p:spPr>
           <a:xfrm>
-            <a:off x="5029200" y="6473952"/>
-            <a:ext cx="6793992" cy="292608"/>
+            <a:off x="4663440" y="6473952"/>
+            <a:ext cx="7159752" cy="292608"/>
           </a:xfrm>
           <a:prstGeom prst="rect">
             <a:avLst/>
@@ -14395,7 +14395,7 @@
         <p:spPr>
           <a:xfrm>
             <a:off x="365760" y="6473952"/>
-            <a:ext cx="7772400" cy="292608"/>
+            <a:ext cx="4206240" cy="292608"/>
           </a:xfrm>
           <a:prstGeom prst="rect">
             <a:avLst/>
@@ -14416,7 +14416,7 @@
                 </a:solidFill>
                 <a:latin typeface="Calibri"/>
               </a:rPr>
-              <a:t>AURIS  ·  Yapay Zekâ Üretimli Müzik Tespiti</a:t>
+              <a:t>AURIS · YZ Üretimli Müzik Tespiti</a:t>
             </a:r>
           </a:p>
         </p:txBody>
@@ -14429,8 +14429,8 @@
         </p:nvSpPr>
         <p:spPr>
           <a:xfrm>
-            <a:off x="5029200" y="6473952"/>
-            <a:ext cx="6793992" cy="292608"/>
+            <a:off x="4663440" y="6473952"/>
+            <a:ext cx="7159752" cy="292608"/>
           </a:xfrm>
           <a:prstGeom prst="rect">
             <a:avLst/>
@@ -16340,7 +16340,7 @@
         <p:spPr>
           <a:xfrm>
             <a:off x="365760" y="6473952"/>
-            <a:ext cx="7772400" cy="292608"/>
+            <a:ext cx="4206240" cy="292608"/>
           </a:xfrm>
           <a:prstGeom prst="rect">
             <a:avLst/>
@@ -16361,7 +16361,7 @@
                 </a:solidFill>
                 <a:latin typeface="Calibri"/>
               </a:rPr>
-              <a:t>AURIS  ·  Yapay Zekâ Üretimli Müzik Tespiti</a:t>
+              <a:t>AURIS · YZ Üretimli Müzik Tespiti</a:t>
             </a:r>
           </a:p>
         </p:txBody>
@@ -16374,8 +16374,8 @@
         </p:nvSpPr>
         <p:spPr>
           <a:xfrm>
-            <a:off x="5029200" y="6473952"/>
-            <a:ext cx="6793992" cy="292608"/>
+            <a:off x="4663440" y="6473952"/>
+            <a:ext cx="7159752" cy="292608"/>
           </a:xfrm>
           <a:prstGeom prst="rect">
             <a:avLst/>
@@ -17281,7 +17281,7 @@
         <p:spPr>
           <a:xfrm>
             <a:off x="365760" y="6473952"/>
-            <a:ext cx="7772400" cy="292608"/>
+            <a:ext cx="4206240" cy="292608"/>
           </a:xfrm>
           <a:prstGeom prst="rect">
             <a:avLst/>
@@ -17302,7 +17302,7 @@
                 </a:solidFill>
                 <a:latin typeface="Calibri"/>
               </a:rPr>
-              <a:t>AURIS  ·  Yapay Zekâ Üretimli Müzik Tespiti</a:t>
+              <a:t>AURIS · YZ Üretimli Müzik Tespiti</a:t>
             </a:r>
           </a:p>
         </p:txBody>
@@ -17315,8 +17315,8 @@
         </p:nvSpPr>
         <p:spPr>
           <a:xfrm>
-            <a:off x="5029200" y="6473952"/>
-            <a:ext cx="6793992" cy="292608"/>
+            <a:off x="4663440" y="6473952"/>
+            <a:ext cx="7159752" cy="292608"/>
           </a:xfrm>
           <a:prstGeom prst="rect">
             <a:avLst/>
@@ -19397,7 +19397,7 @@
         <p:spPr>
           <a:xfrm>
             <a:off x="365760" y="6473952"/>
-            <a:ext cx="7772400" cy="292608"/>
+            <a:ext cx="4206240" cy="292608"/>
           </a:xfrm>
           <a:prstGeom prst="rect">
             <a:avLst/>
@@ -19418,7 +19418,7 @@
                 </a:solidFill>
                 <a:latin typeface="Calibri"/>
               </a:rPr>
-              <a:t>AURIS  ·  Yapay Zekâ Üretimli Müzik Tespiti</a:t>
+              <a:t>AURIS · YZ Üretimli Müzik Tespiti</a:t>
             </a:r>
           </a:p>
         </p:txBody>
@@ -19431,8 +19431,8 @@
         </p:nvSpPr>
         <p:spPr>
           <a:xfrm>
-            <a:off x="5029200" y="6473952"/>
-            <a:ext cx="6793992" cy="292608"/>
+            <a:off x="4663440" y="6473952"/>
+            <a:ext cx="7159752" cy="292608"/>
           </a:xfrm>
           <a:prstGeom prst="rect">
             <a:avLst/>
@@ -20123,7 +20123,7 @@
         <p:spPr>
           <a:xfrm>
             <a:off x="365760" y="6473952"/>
-            <a:ext cx="7772400" cy="292608"/>
+            <a:ext cx="4206240" cy="292608"/>
           </a:xfrm>
           <a:prstGeom prst="rect">
             <a:avLst/>
@@ -20144,7 +20144,7 @@
                 </a:solidFill>
                 <a:latin typeface="Calibri"/>
               </a:rPr>
-              <a:t>AURIS  ·  Yapay Zekâ Üretimli Müzik Tespiti</a:t>
+              <a:t>AURIS · YZ Üretimli Müzik Tespiti</a:t>
             </a:r>
           </a:p>
         </p:txBody>
@@ -20157,8 +20157,8 @@
         </p:nvSpPr>
         <p:spPr>
           <a:xfrm>
-            <a:off x="5029200" y="6473952"/>
-            <a:ext cx="6793992" cy="292608"/>
+            <a:off x="4663440" y="6473952"/>
+            <a:ext cx="7159752" cy="292608"/>
           </a:xfrm>
           <a:prstGeom prst="rect">
             <a:avLst/>
@@ -21905,7 +21905,7 @@
         <p:spPr>
           <a:xfrm>
             <a:off x="365760" y="6473952"/>
-            <a:ext cx="7772400" cy="292608"/>
+            <a:ext cx="4206240" cy="292608"/>
           </a:xfrm>
           <a:prstGeom prst="rect">
             <a:avLst/>
@@ -21926,7 +21926,7 @@
                 </a:solidFill>
                 <a:latin typeface="Calibri"/>
               </a:rPr>
-              <a:t>AURIS  ·  Yapay Zekâ Üretimli Müzik Tespiti</a:t>
+              <a:t>AURIS · YZ Üretimli Müzik Tespiti</a:t>
             </a:r>
           </a:p>
         </p:txBody>
@@ -21939,8 +21939,8 @@
         </p:nvSpPr>
         <p:spPr>
           <a:xfrm>
-            <a:off x="5029200" y="6473952"/>
-            <a:ext cx="6793992" cy="292608"/>
+            <a:off x="4663440" y="6473952"/>
+            <a:ext cx="7159752" cy="292608"/>
           </a:xfrm>
           <a:prstGeom prst="rect">
             <a:avLst/>
@@ -23417,7 +23417,7 @@
         <p:spPr>
           <a:xfrm>
             <a:off x="365760" y="6473952"/>
-            <a:ext cx="7772400" cy="292608"/>
+            <a:ext cx="4206240" cy="292608"/>
           </a:xfrm>
           <a:prstGeom prst="rect">
             <a:avLst/>
@@ -23438,7 +23438,7 @@
                 </a:solidFill>
                 <a:latin typeface="Calibri"/>
               </a:rPr>
-              <a:t>AURIS  ·  Yapay Zekâ Üretimli Müzik Tespiti</a:t>
+              <a:t>AURIS · YZ Üretimli Müzik Tespiti</a:t>
             </a:r>
           </a:p>
         </p:txBody>
@@ -23451,8 +23451,8 @@
         </p:nvSpPr>
         <p:spPr>
           <a:xfrm>
-            <a:off x="5029200" y="6473952"/>
-            <a:ext cx="6793992" cy="292608"/>
+            <a:off x="4663440" y="6473952"/>
+            <a:ext cx="7159752" cy="292608"/>
           </a:xfrm>
           <a:prstGeom prst="rect">
             <a:avLst/>
@@ -27197,7 +27197,7 @@
         <p:spPr>
           <a:xfrm>
             <a:off x="365760" y="6473952"/>
-            <a:ext cx="7772400" cy="292608"/>
+            <a:ext cx="4206240" cy="292608"/>
           </a:xfrm>
           <a:prstGeom prst="rect">
             <a:avLst/>
@@ -27218,7 +27218,7 @@
                 </a:solidFill>
                 <a:latin typeface="Calibri"/>
               </a:rPr>
-              <a:t>AURIS  ·  Yapay Zekâ Üretimli Müzik Tespiti</a:t>
+              <a:t>AURIS · YZ Üretimli Müzik Tespiti</a:t>
             </a:r>
           </a:p>
         </p:txBody>
@@ -27231,8 +27231,8 @@
         </p:nvSpPr>
         <p:spPr>
           <a:xfrm>
-            <a:off x="5029200" y="6473952"/>
-            <a:ext cx="6793992" cy="292608"/>
+            <a:off x="4663440" y="6473952"/>
+            <a:ext cx="7159752" cy="292608"/>
           </a:xfrm>
           <a:prstGeom prst="rect">
             <a:avLst/>
@@ -28278,7 +28278,7 @@
         <p:spPr>
           <a:xfrm>
             <a:off x="365760" y="6473952"/>
-            <a:ext cx="7772400" cy="292608"/>
+            <a:ext cx="4206240" cy="292608"/>
           </a:xfrm>
           <a:prstGeom prst="rect">
             <a:avLst/>
@@ -28299,7 +28299,7 @@
                 </a:solidFill>
                 <a:latin typeface="Calibri"/>
               </a:rPr>
-              <a:t>AURIS  ·  Yapay Zekâ Üretimli Müzik Tespiti</a:t>
+              <a:t>AURIS · YZ Üretimli Müzik Tespiti</a:t>
             </a:r>
           </a:p>
         </p:txBody>
@@ -28312,8 +28312,8 @@
         </p:nvSpPr>
         <p:spPr>
           <a:xfrm>
-            <a:off x="5029200" y="6473952"/>
-            <a:ext cx="6793992" cy="292608"/>
+            <a:off x="4663440" y="6473952"/>
+            <a:ext cx="7159752" cy="292608"/>
           </a:xfrm>
           <a:prstGeom prst="rect">
             <a:avLst/>
@@ -29489,7 +29489,7 @@
         <p:spPr>
           <a:xfrm>
             <a:off x="365760" y="6473952"/>
-            <a:ext cx="7772400" cy="292608"/>
+            <a:ext cx="4206240" cy="292608"/>
           </a:xfrm>
           <a:prstGeom prst="rect">
             <a:avLst/>
@@ -29510,7 +29510,7 @@
                 </a:solidFill>
                 <a:latin typeface="Calibri"/>
               </a:rPr>
-              <a:t>AURIS  ·  Yapay Zekâ Üretimli Müzik Tespiti</a:t>
+              <a:t>AURIS · YZ Üretimli Müzik Tespiti</a:t>
             </a:r>
           </a:p>
         </p:txBody>
@@ -29523,8 +29523,8 @@
         </p:nvSpPr>
         <p:spPr>
           <a:xfrm>
-            <a:off x="5029200" y="6473952"/>
-            <a:ext cx="6793992" cy="292608"/>
+            <a:off x="4663440" y="6473952"/>
+            <a:ext cx="7159752" cy="292608"/>
           </a:xfrm>
           <a:prstGeom prst="rect">
             <a:avLst/>
@@ -30531,7 +30531,7 @@
         <p:spPr>
           <a:xfrm>
             <a:off x="365760" y="6473952"/>
-            <a:ext cx="7772400" cy="292608"/>
+            <a:ext cx="4206240" cy="292608"/>
           </a:xfrm>
           <a:prstGeom prst="rect">
             <a:avLst/>
@@ -30552,7 +30552,7 @@
                 </a:solidFill>
                 <a:latin typeface="Calibri"/>
               </a:rPr>
-              <a:t>AURIS  ·  Yapay Zekâ Üretimli Müzik Tespiti</a:t>
+              <a:t>AURIS · YZ Üretimli Müzik Tespiti</a:t>
             </a:r>
           </a:p>
         </p:txBody>
@@ -30565,8 +30565,8 @@
         </p:nvSpPr>
         <p:spPr>
           <a:xfrm>
-            <a:off x="5029200" y="6473952"/>
-            <a:ext cx="6793992" cy="292608"/>
+            <a:off x="4663440" y="6473952"/>
+            <a:ext cx="7159752" cy="292608"/>
           </a:xfrm>
           <a:prstGeom prst="rect">
             <a:avLst/>
@@ -32098,7 +32098,7 @@
         <p:spPr>
           <a:xfrm>
             <a:off x="365760" y="6473952"/>
-            <a:ext cx="7772400" cy="292608"/>
+            <a:ext cx="4206240" cy="292608"/>
           </a:xfrm>
           <a:prstGeom prst="rect">
             <a:avLst/>
@@ -32119,7 +32119,7 @@
                 </a:solidFill>
                 <a:latin typeface="Calibri"/>
               </a:rPr>
-              <a:t>AURIS  ·  Yapay Zekâ Üretimli Müzik Tespiti</a:t>
+              <a:t>AURIS · YZ Üretimli Müzik Tespiti</a:t>
             </a:r>
           </a:p>
         </p:txBody>
@@ -32132,8 +32132,8 @@
         </p:nvSpPr>
         <p:spPr>
           <a:xfrm>
-            <a:off x="5029200" y="6473952"/>
-            <a:ext cx="6793992" cy="292608"/>
+            <a:off x="4663440" y="6473952"/>
+            <a:ext cx="7159752" cy="292608"/>
           </a:xfrm>
           <a:prstGeom prst="rect">
             <a:avLst/>
@@ -35324,7 +35324,7 @@
         <p:spPr>
           <a:xfrm>
             <a:off x="365760" y="6473952"/>
-            <a:ext cx="7772400" cy="292608"/>
+            <a:ext cx="4206240" cy="292608"/>
           </a:xfrm>
           <a:prstGeom prst="rect">
             <a:avLst/>
@@ -35345,7 +35345,7 @@
                 </a:solidFill>
                 <a:latin typeface="Calibri"/>
               </a:rPr>
-              <a:t>AURIS  ·  Yapay Zekâ Üretimli Müzik Tespiti</a:t>
+              <a:t>AURIS · YZ Üretimli Müzik Tespiti</a:t>
             </a:r>
           </a:p>
         </p:txBody>
@@ -35358,8 +35358,8 @@
         </p:nvSpPr>
         <p:spPr>
           <a:xfrm>
-            <a:off x="5029200" y="6473952"/>
-            <a:ext cx="6793992" cy="292608"/>
+            <a:off x="4663440" y="6473952"/>
+            <a:ext cx="7159752" cy="292608"/>
           </a:xfrm>
           <a:prstGeom prst="rect">
             <a:avLst/>
@@ -37220,7 +37220,7 @@
         <p:spPr>
           <a:xfrm>
             <a:off x="365760" y="6473952"/>
-            <a:ext cx="7772400" cy="292608"/>
+            <a:ext cx="4206240" cy="292608"/>
           </a:xfrm>
           <a:prstGeom prst="rect">
             <a:avLst/>
@@ -37241,7 +37241,7 @@
                 </a:solidFill>
                 <a:latin typeface="Calibri"/>
               </a:rPr>
-              <a:t>AURIS  ·  Yapay Zekâ Üretimli Müzik Tespiti</a:t>
+              <a:t>AURIS · YZ Üretimli Müzik Tespiti</a:t>
             </a:r>
           </a:p>
         </p:txBody>
@@ -37254,8 +37254,8 @@
         </p:nvSpPr>
         <p:spPr>
           <a:xfrm>
-            <a:off x="5029200" y="6473952"/>
-            <a:ext cx="6793992" cy="292608"/>
+            <a:off x="4663440" y="6473952"/>
+            <a:ext cx="7159752" cy="292608"/>
           </a:xfrm>
           <a:prstGeom prst="rect">
             <a:avLst/>
@@ -38720,7 +38720,7 @@
         <p:spPr>
           <a:xfrm>
             <a:off x="8001000" y="3950208"/>
-            <a:ext cx="3822191" cy="2103120"/>
+            <a:ext cx="3822191" cy="2240280"/>
           </a:xfrm>
           <a:prstGeom prst="rect">
             <a:avLst/>
@@ -38764,7 +38764,7 @@
         <p:spPr>
           <a:xfrm>
             <a:off x="8001000" y="3950208"/>
-            <a:ext cx="91440" cy="2103120"/>
+            <a:ext cx="91440" cy="2240280"/>
           </a:xfrm>
           <a:prstGeom prst="rect">
             <a:avLst/>
@@ -38829,7 +38829,7 @@
                 </a:solidFill>
                 <a:latin typeface="Calibri"/>
               </a:rPr>
-              <a:t>Eşik Optimizasyonu</a:t>
+              <a:t>Eşik Optimizasyonu (Youden J)</a:t>
             </a:r>
           </a:p>
         </p:txBody>
@@ -38843,7 +38843,7 @@
         <p:spPr>
           <a:xfrm>
             <a:off x="8220456" y="4498848"/>
-            <a:ext cx="3438144" cy="1444751"/>
+            <a:ext cx="3438144" cy="1581912"/>
           </a:xfrm>
           <a:prstGeom prst="rect">
             <a:avLst/>
@@ -38909,7 +38909,7 @@
                 </a:solidFill>
                 <a:latin typeface="Calibri"/>
               </a:rPr>
-              <a:t>θ* = 0,4316  (0,5 yerine)</a:t>
+              <a:t>θ* = 0,4316  (varsayılan 0,5 yerine)</a:t>
             </a:r>
           </a:p>
           <a:p>
@@ -38947,49 +38947,14 @@
                 </a:solidFill>
                 <a:latin typeface="Calibri"/>
               </a:rPr>
-              <a:t>Brier skoru = 0,083 → iyi kalibre</a:t>
-            </a:r>
-          </a:p>
-        </p:txBody>
-      </p:sp>
-      <p:sp>
-        <p:nvSpPr>
-          <p:cNvPr id="39" name="TextBox 38"/>
-          <p:cNvSpPr txBox="1"/>
-          <p:nvPr/>
-        </p:nvSpPr>
-        <p:spPr>
-          <a:xfrm>
-            <a:off x="365760" y="5029200"/>
-            <a:ext cx="7406640" cy="1005840"/>
-          </a:xfrm>
-          <a:prstGeom prst="rect">
-            <a:avLst/>
-          </a:prstGeom>
-          <a:noFill/>
-        </p:spPr>
-        <p:txBody>
-          <a:bodyPr wrap="square" anchor="t" lIns="25400" rIns="25400" tIns="12700" bIns="12700">
-            <a:spAutoFit/>
-          </a:bodyPr>
-          <a:lstStyle/>
-          <a:p>
-            <a:pPr algn="l"/>
-            <a:r>
-              <a:rPr sz="1150" b="0" i="0">
-                <a:solidFill>
-                  <a:srgbClr val="242A30"/>
-                </a:solidFill>
-                <a:latin typeface="Calibri"/>
-              </a:rPr>
-              <a:t>Karar eşiği Youden J kriteriyle 0,5 yerine 0,4316'ya optimize edildi. Brier skoru 0,083, modelin güven düzeylerinin gerçek doğruluğu iyi yansıttığını gösterir.</a:t>
-            </a:r>
-          </a:p>
-        </p:txBody>
-      </p:sp>
-      <p:sp>
-        <p:nvSpPr>
-          <p:cNvPr id="40" name="Rectangle 39"/>
+              <a:t>Brier skoru = 0,083 → model iyi kalibre; güven düzeyleri gerçek doğruluğu yansıtır.</a:t>
+            </a:r>
+          </a:p>
+        </p:txBody>
+      </p:sp>
+      <p:sp>
+        <p:nvSpPr>
+          <p:cNvPr id="39" name="Rectangle 38"/>
           <p:cNvSpPr/>
           <p:nvPr/>
         </p:nvSpPr>
@@ -39033,49 +38998,49 @@
       </p:sp>
       <p:sp>
         <p:nvSpPr>
+          <p:cNvPr id="40" name="TextBox 39"/>
+          <p:cNvSpPr txBox="1"/>
+          <p:nvPr/>
+        </p:nvSpPr>
+        <p:spPr>
+          <a:xfrm>
+            <a:off x="365760" y="6473952"/>
+            <a:ext cx="4206240" cy="292608"/>
+          </a:xfrm>
+          <a:prstGeom prst="rect">
+            <a:avLst/>
+          </a:prstGeom>
+          <a:noFill/>
+        </p:spPr>
+        <p:txBody>
+          <a:bodyPr wrap="square" anchor="t" lIns="25400" rIns="25400" tIns="12700" bIns="12700">
+            <a:spAutoFit/>
+          </a:bodyPr>
+          <a:lstStyle/>
+          <a:p>
+            <a:pPr algn="l"/>
+            <a:r>
+              <a:rPr sz="900" b="0" i="0">
+                <a:solidFill>
+                  <a:srgbClr val="6A7480"/>
+                </a:solidFill>
+                <a:latin typeface="Calibri"/>
+              </a:rPr>
+              <a:t>AURIS · YZ Üretimli Müzik Tespiti</a:t>
+            </a:r>
+          </a:p>
+        </p:txBody>
+      </p:sp>
+      <p:sp>
+        <p:nvSpPr>
           <p:cNvPr id="41" name="TextBox 40"/>
           <p:cNvSpPr txBox="1"/>
           <p:nvPr/>
         </p:nvSpPr>
         <p:spPr>
           <a:xfrm>
-            <a:off x="365760" y="6473952"/>
-            <a:ext cx="7772400" cy="292608"/>
-          </a:xfrm>
-          <a:prstGeom prst="rect">
-            <a:avLst/>
-          </a:prstGeom>
-          <a:noFill/>
-        </p:spPr>
-        <p:txBody>
-          <a:bodyPr wrap="square" anchor="t" lIns="25400" rIns="25400" tIns="12700" bIns="12700">
-            <a:spAutoFit/>
-          </a:bodyPr>
-          <a:lstStyle/>
-          <a:p>
-            <a:pPr algn="l"/>
-            <a:r>
-              <a:rPr sz="900" b="0" i="0">
-                <a:solidFill>
-                  <a:srgbClr val="6A7480"/>
-                </a:solidFill>
-                <a:latin typeface="Calibri"/>
-              </a:rPr>
-              <a:t>AURIS  ·  Yapay Zekâ Üretimli Müzik Tespiti</a:t>
-            </a:r>
-          </a:p>
-        </p:txBody>
-      </p:sp>
-      <p:sp>
-        <p:nvSpPr>
-          <p:cNvPr id="42" name="TextBox 41"/>
-          <p:cNvSpPr txBox="1"/>
-          <p:nvPr/>
-        </p:nvSpPr>
-        <p:spPr>
-          <a:xfrm>
-            <a:off x="5029200" y="6473952"/>
-            <a:ext cx="6793992" cy="292608"/>
+            <a:off x="4663440" y="6473952"/>
+            <a:ext cx="7159752" cy="292608"/>
           </a:xfrm>
           <a:prstGeom prst="rect">
             <a:avLst/>
@@ -39372,7 +39337,7 @@
         </p:nvSpPr>
         <p:spPr>
           <a:xfrm>
-            <a:off x="365760" y="1572768"/>
+            <a:off x="365760" y="1536192"/>
             <a:ext cx="548640" cy="384048"/>
           </a:xfrm>
           <a:prstGeom prst="rect">
@@ -39416,7 +39381,7 @@
         </p:nvSpPr>
         <p:spPr>
           <a:xfrm>
-            <a:off x="365760" y="1572768"/>
+            <a:off x="365760" y="1536192"/>
             <a:ext cx="548640" cy="384048"/>
           </a:xfrm>
           <a:prstGeom prst="rect">
@@ -39451,7 +39416,7 @@
         </p:nvSpPr>
         <p:spPr>
           <a:xfrm>
-            <a:off x="914400" y="1572768"/>
+            <a:off x="914400" y="1536192"/>
             <a:ext cx="2834640" cy="384048"/>
           </a:xfrm>
           <a:prstGeom prst="rect">
@@ -39495,7 +39460,7 @@
         </p:nvSpPr>
         <p:spPr>
           <a:xfrm>
-            <a:off x="1005840" y="1572768"/>
+            <a:off x="1005840" y="1536192"/>
             <a:ext cx="2651760" cy="384048"/>
           </a:xfrm>
           <a:prstGeom prst="rect">
@@ -39530,7 +39495,7 @@
         </p:nvSpPr>
         <p:spPr>
           <a:xfrm>
-            <a:off x="3749039" y="1572768"/>
+            <a:off x="3749039" y="1536192"/>
             <a:ext cx="914400" cy="384048"/>
           </a:xfrm>
           <a:prstGeom prst="rect">
@@ -39574,7 +39539,7 @@
         </p:nvSpPr>
         <p:spPr>
           <a:xfrm>
-            <a:off x="3749039" y="1572768"/>
+            <a:off x="3749039" y="1536192"/>
             <a:ext cx="914400" cy="384048"/>
           </a:xfrm>
           <a:prstGeom prst="rect">
@@ -39609,7 +39574,7 @@
         </p:nvSpPr>
         <p:spPr>
           <a:xfrm>
-            <a:off x="4663440" y="1572768"/>
+            <a:off x="4663440" y="1536192"/>
             <a:ext cx="1783080" cy="384048"/>
           </a:xfrm>
           <a:prstGeom prst="rect">
@@ -39653,7 +39618,7 @@
         </p:nvSpPr>
         <p:spPr>
           <a:xfrm>
-            <a:off x="4663440" y="1572768"/>
+            <a:off x="4663440" y="1536192"/>
             <a:ext cx="1783080" cy="384048"/>
           </a:xfrm>
           <a:prstGeom prst="rect">
@@ -39688,7 +39653,7 @@
         </p:nvSpPr>
         <p:spPr>
           <a:xfrm>
-            <a:off x="6446520" y="1572768"/>
+            <a:off x="6446520" y="1536192"/>
             <a:ext cx="1600200" cy="384048"/>
           </a:xfrm>
           <a:prstGeom prst="rect">
@@ -39732,7 +39697,7 @@
         </p:nvSpPr>
         <p:spPr>
           <a:xfrm>
-            <a:off x="6446520" y="1572768"/>
+            <a:off x="6446520" y="1536192"/>
             <a:ext cx="1600200" cy="384048"/>
           </a:xfrm>
           <a:prstGeom prst="rect">
@@ -39767,7 +39732,7 @@
         </p:nvSpPr>
         <p:spPr>
           <a:xfrm>
-            <a:off x="8046720" y="1572768"/>
+            <a:off x="8046720" y="1536192"/>
             <a:ext cx="1783080" cy="384048"/>
           </a:xfrm>
           <a:prstGeom prst="rect">
@@ -39811,7 +39776,7 @@
         </p:nvSpPr>
         <p:spPr>
           <a:xfrm>
-            <a:off x="8046720" y="1572768"/>
+            <a:off x="8046720" y="1536192"/>
             <a:ext cx="1783080" cy="384048"/>
           </a:xfrm>
           <a:prstGeom prst="rect">
@@ -39846,7 +39811,7 @@
         </p:nvSpPr>
         <p:spPr>
           <a:xfrm>
-            <a:off x="9829800" y="1572768"/>
+            <a:off x="9829800" y="1536192"/>
             <a:ext cx="1627632" cy="384048"/>
           </a:xfrm>
           <a:prstGeom prst="rect">
@@ -39890,7 +39855,7 @@
         </p:nvSpPr>
         <p:spPr>
           <a:xfrm>
-            <a:off x="9829800" y="1572768"/>
+            <a:off x="9829800" y="1536192"/>
             <a:ext cx="1627632" cy="384048"/>
           </a:xfrm>
           <a:prstGeom prst="rect">
@@ -39925,8 +39890,8 @@
         </p:nvSpPr>
         <p:spPr>
           <a:xfrm>
-            <a:off x="365760" y="1956816"/>
-            <a:ext cx="548640" cy="393192"/>
+            <a:off x="365760" y="1920240"/>
+            <a:ext cx="548640" cy="374904"/>
           </a:xfrm>
           <a:prstGeom prst="rect">
             <a:avLst/>
@@ -39971,8 +39936,8 @@
         </p:nvSpPr>
         <p:spPr>
           <a:xfrm>
-            <a:off x="393192" y="1956816"/>
-            <a:ext cx="493776" cy="393192"/>
+            <a:off x="393192" y="1920240"/>
+            <a:ext cx="493776" cy="374904"/>
           </a:xfrm>
           <a:prstGeom prst="rect">
             <a:avLst/>
@@ -40006,8 +39971,8 @@
         </p:nvSpPr>
         <p:spPr>
           <a:xfrm>
-            <a:off x="914400" y="1956816"/>
-            <a:ext cx="2834640" cy="393192"/>
+            <a:off x="914400" y="1920240"/>
+            <a:ext cx="2834640" cy="374904"/>
           </a:xfrm>
           <a:prstGeom prst="rect">
             <a:avLst/>
@@ -40052,8 +40017,8 @@
         </p:nvSpPr>
         <p:spPr>
           <a:xfrm>
-            <a:off x="1005840" y="1956816"/>
-            <a:ext cx="2651760" cy="393192"/>
+            <a:off x="1005840" y="1920240"/>
+            <a:ext cx="2651760" cy="374904"/>
           </a:xfrm>
           <a:prstGeom prst="rect">
             <a:avLst/>
@@ -40087,8 +40052,8 @@
         </p:nvSpPr>
         <p:spPr>
           <a:xfrm>
-            <a:off x="3749039" y="1956816"/>
-            <a:ext cx="914400" cy="393192"/>
+            <a:off x="3749039" y="1920240"/>
+            <a:ext cx="914400" cy="374904"/>
           </a:xfrm>
           <a:prstGeom prst="rect">
             <a:avLst/>
@@ -40133,8 +40098,8 @@
         </p:nvSpPr>
         <p:spPr>
           <a:xfrm>
-            <a:off x="3776472" y="1956816"/>
-            <a:ext cx="859536" cy="393192"/>
+            <a:off x="3776472" y="1920240"/>
+            <a:ext cx="859536" cy="374904"/>
           </a:xfrm>
           <a:prstGeom prst="rect">
             <a:avLst/>
@@ -40168,8 +40133,8 @@
         </p:nvSpPr>
         <p:spPr>
           <a:xfrm>
-            <a:off x="4663440" y="1956816"/>
-            <a:ext cx="1783080" cy="393192"/>
+            <a:off x="4663440" y="1920240"/>
+            <a:ext cx="1783080" cy="374904"/>
           </a:xfrm>
           <a:prstGeom prst="rect">
             <a:avLst/>
@@ -40214,8 +40179,8 @@
         </p:nvSpPr>
         <p:spPr>
           <a:xfrm>
-            <a:off x="4690872" y="1956816"/>
-            <a:ext cx="1728216" cy="393192"/>
+            <a:off x="4690872" y="1920240"/>
+            <a:ext cx="1728216" cy="374904"/>
           </a:xfrm>
           <a:prstGeom prst="rect">
             <a:avLst/>
@@ -40249,8 +40214,8 @@
         </p:nvSpPr>
         <p:spPr>
           <a:xfrm>
-            <a:off x="6446520" y="1956816"/>
-            <a:ext cx="1600200" cy="393192"/>
+            <a:off x="6446520" y="1920240"/>
+            <a:ext cx="1600200" cy="374904"/>
           </a:xfrm>
           <a:prstGeom prst="rect">
             <a:avLst/>
@@ -40295,8 +40260,8 @@
         </p:nvSpPr>
         <p:spPr>
           <a:xfrm>
-            <a:off x="6473952" y="1956816"/>
-            <a:ext cx="1545336" cy="393192"/>
+            <a:off x="6473952" y="1920240"/>
+            <a:ext cx="1545336" cy="374904"/>
           </a:xfrm>
           <a:prstGeom prst="rect">
             <a:avLst/>
@@ -40330,8 +40295,8 @@
         </p:nvSpPr>
         <p:spPr>
           <a:xfrm>
-            <a:off x="8046720" y="1956816"/>
-            <a:ext cx="1783080" cy="393192"/>
+            <a:off x="8046720" y="1920240"/>
+            <a:ext cx="1783080" cy="374904"/>
           </a:xfrm>
           <a:prstGeom prst="rect">
             <a:avLst/>
@@ -40376,8 +40341,8 @@
         </p:nvSpPr>
         <p:spPr>
           <a:xfrm>
-            <a:off x="8074152" y="1956816"/>
-            <a:ext cx="1728216" cy="393192"/>
+            <a:off x="8074152" y="1920240"/>
+            <a:ext cx="1728216" cy="374904"/>
           </a:xfrm>
           <a:prstGeom prst="rect">
             <a:avLst/>
@@ -40411,8 +40376,8 @@
         </p:nvSpPr>
         <p:spPr>
           <a:xfrm>
-            <a:off x="9829800" y="1956816"/>
-            <a:ext cx="1627632" cy="393192"/>
+            <a:off x="9829800" y="1920240"/>
+            <a:ext cx="1627632" cy="374904"/>
           </a:xfrm>
           <a:prstGeom prst="rect">
             <a:avLst/>
@@ -40457,8 +40422,8 @@
         </p:nvSpPr>
         <p:spPr>
           <a:xfrm>
-            <a:off x="9857232" y="1956816"/>
-            <a:ext cx="1572768" cy="393192"/>
+            <a:off x="9857232" y="1920240"/>
+            <a:ext cx="1572768" cy="374904"/>
           </a:xfrm>
           <a:prstGeom prst="rect">
             <a:avLst/>
@@ -40492,8 +40457,8 @@
         </p:nvSpPr>
         <p:spPr>
           <a:xfrm>
-            <a:off x="365760" y="2350008"/>
-            <a:ext cx="548640" cy="393192"/>
+            <a:off x="365760" y="2295144"/>
+            <a:ext cx="548640" cy="374904"/>
           </a:xfrm>
           <a:prstGeom prst="rect">
             <a:avLst/>
@@ -40538,8 +40503,8 @@
         </p:nvSpPr>
         <p:spPr>
           <a:xfrm>
-            <a:off x="393192" y="2350008"/>
-            <a:ext cx="493776" cy="393192"/>
+            <a:off x="393192" y="2295144"/>
+            <a:ext cx="493776" cy="374904"/>
           </a:xfrm>
           <a:prstGeom prst="rect">
             <a:avLst/>
@@ -40573,8 +40538,8 @@
         </p:nvSpPr>
         <p:spPr>
           <a:xfrm>
-            <a:off x="914400" y="2350008"/>
-            <a:ext cx="2834640" cy="393192"/>
+            <a:off x="914400" y="2295144"/>
+            <a:ext cx="2834640" cy="374904"/>
           </a:xfrm>
           <a:prstGeom prst="rect">
             <a:avLst/>
@@ -40619,8 +40584,8 @@
         </p:nvSpPr>
         <p:spPr>
           <a:xfrm>
-            <a:off x="1005840" y="2350008"/>
-            <a:ext cx="2651760" cy="393192"/>
+            <a:off x="1005840" y="2295144"/>
+            <a:ext cx="2651760" cy="374904"/>
           </a:xfrm>
           <a:prstGeom prst="rect">
             <a:avLst/>
@@ -40654,8 +40619,8 @@
         </p:nvSpPr>
         <p:spPr>
           <a:xfrm>
-            <a:off x="3749039" y="2350008"/>
-            <a:ext cx="914400" cy="393192"/>
+            <a:off x="3749039" y="2295144"/>
+            <a:ext cx="914400" cy="374904"/>
           </a:xfrm>
           <a:prstGeom prst="rect">
             <a:avLst/>
@@ -40700,8 +40665,8 @@
         </p:nvSpPr>
         <p:spPr>
           <a:xfrm>
-            <a:off x="3776472" y="2350008"/>
-            <a:ext cx="859536" cy="393192"/>
+            <a:off x="3776472" y="2295144"/>
+            <a:ext cx="859536" cy="374904"/>
           </a:xfrm>
           <a:prstGeom prst="rect">
             <a:avLst/>
@@ -40735,8 +40700,8 @@
         </p:nvSpPr>
         <p:spPr>
           <a:xfrm>
-            <a:off x="4663440" y="2350008"/>
-            <a:ext cx="1783080" cy="393192"/>
+            <a:off x="4663440" y="2295144"/>
+            <a:ext cx="1783080" cy="374904"/>
           </a:xfrm>
           <a:prstGeom prst="rect">
             <a:avLst/>
@@ -40781,8 +40746,8 @@
         </p:nvSpPr>
         <p:spPr>
           <a:xfrm>
-            <a:off x="4690872" y="2350008"/>
-            <a:ext cx="1728216" cy="393192"/>
+            <a:off x="4690872" y="2295144"/>
+            <a:ext cx="1728216" cy="374904"/>
           </a:xfrm>
           <a:prstGeom prst="rect">
             <a:avLst/>
@@ -40816,8 +40781,8 @@
         </p:nvSpPr>
         <p:spPr>
           <a:xfrm>
-            <a:off x="6446520" y="2350008"/>
-            <a:ext cx="1600200" cy="393192"/>
+            <a:off x="6446520" y="2295144"/>
+            <a:ext cx="1600200" cy="374904"/>
           </a:xfrm>
           <a:prstGeom prst="rect">
             <a:avLst/>
@@ -40862,8 +40827,8 @@
         </p:nvSpPr>
         <p:spPr>
           <a:xfrm>
-            <a:off x="6473952" y="2350008"/>
-            <a:ext cx="1545336" cy="393192"/>
+            <a:off x="6473952" y="2295144"/>
+            <a:ext cx="1545336" cy="374904"/>
           </a:xfrm>
           <a:prstGeom prst="rect">
             <a:avLst/>
@@ -40897,8 +40862,8 @@
         </p:nvSpPr>
         <p:spPr>
           <a:xfrm>
-            <a:off x="8046720" y="2350008"/>
-            <a:ext cx="1783080" cy="393192"/>
+            <a:off x="8046720" y="2295144"/>
+            <a:ext cx="1783080" cy="374904"/>
           </a:xfrm>
           <a:prstGeom prst="rect">
             <a:avLst/>
@@ -40943,8 +40908,8 @@
         </p:nvSpPr>
         <p:spPr>
           <a:xfrm>
-            <a:off x="8074152" y="2350008"/>
-            <a:ext cx="1728216" cy="393192"/>
+            <a:off x="8074152" y="2295144"/>
+            <a:ext cx="1728216" cy="374904"/>
           </a:xfrm>
           <a:prstGeom prst="rect">
             <a:avLst/>
@@ -40978,8 +40943,8 @@
         </p:nvSpPr>
         <p:spPr>
           <a:xfrm>
-            <a:off x="9829800" y="2350008"/>
-            <a:ext cx="1627632" cy="393192"/>
+            <a:off x="9829800" y="2295144"/>
+            <a:ext cx="1627632" cy="374904"/>
           </a:xfrm>
           <a:prstGeom prst="rect">
             <a:avLst/>
@@ -41024,8 +40989,8 @@
         </p:nvSpPr>
         <p:spPr>
           <a:xfrm>
-            <a:off x="9857232" y="2350008"/>
-            <a:ext cx="1572768" cy="393192"/>
+            <a:off x="9857232" y="2295144"/>
+            <a:ext cx="1572768" cy="374904"/>
           </a:xfrm>
           <a:prstGeom prst="rect">
             <a:avLst/>
@@ -41059,8 +41024,8 @@
         </p:nvSpPr>
         <p:spPr>
           <a:xfrm>
-            <a:off x="365760" y="2743200"/>
-            <a:ext cx="548640" cy="393192"/>
+            <a:off x="365760" y="2670048"/>
+            <a:ext cx="548640" cy="374904"/>
           </a:xfrm>
           <a:prstGeom prst="rect">
             <a:avLst/>
@@ -41105,8 +41070,8 @@
         </p:nvSpPr>
         <p:spPr>
           <a:xfrm>
-            <a:off x="393192" y="2743200"/>
-            <a:ext cx="493776" cy="393192"/>
+            <a:off x="393192" y="2670048"/>
+            <a:ext cx="493776" cy="374904"/>
           </a:xfrm>
           <a:prstGeom prst="rect">
             <a:avLst/>
@@ -41140,8 +41105,8 @@
         </p:nvSpPr>
         <p:spPr>
           <a:xfrm>
-            <a:off x="914400" y="2743200"/>
-            <a:ext cx="2834640" cy="393192"/>
+            <a:off x="914400" y="2670048"/>
+            <a:ext cx="2834640" cy="374904"/>
           </a:xfrm>
           <a:prstGeom prst="rect">
             <a:avLst/>
@@ -41186,8 +41151,8 @@
         </p:nvSpPr>
         <p:spPr>
           <a:xfrm>
-            <a:off x="1005840" y="2743200"/>
-            <a:ext cx="2651760" cy="393192"/>
+            <a:off x="1005840" y="2670048"/>
+            <a:ext cx="2651760" cy="374904"/>
           </a:xfrm>
           <a:prstGeom prst="rect">
             <a:avLst/>
@@ -41221,8 +41186,8 @@
         </p:nvSpPr>
         <p:spPr>
           <a:xfrm>
-            <a:off x="3749039" y="2743200"/>
-            <a:ext cx="914400" cy="393192"/>
+            <a:off x="3749039" y="2670048"/>
+            <a:ext cx="914400" cy="374904"/>
           </a:xfrm>
           <a:prstGeom prst="rect">
             <a:avLst/>
@@ -41267,8 +41232,8 @@
         </p:nvSpPr>
         <p:spPr>
           <a:xfrm>
-            <a:off x="3776472" y="2743200"/>
-            <a:ext cx="859536" cy="393192"/>
+            <a:off x="3776472" y="2670048"/>
+            <a:ext cx="859536" cy="374904"/>
           </a:xfrm>
           <a:prstGeom prst="rect">
             <a:avLst/>
@@ -41302,8 +41267,8 @@
         </p:nvSpPr>
         <p:spPr>
           <a:xfrm>
-            <a:off x="4663440" y="2743200"/>
-            <a:ext cx="1783080" cy="393192"/>
+            <a:off x="4663440" y="2670048"/>
+            <a:ext cx="1783080" cy="374904"/>
           </a:xfrm>
           <a:prstGeom prst="rect">
             <a:avLst/>
@@ -41348,8 +41313,8 @@
         </p:nvSpPr>
         <p:spPr>
           <a:xfrm>
-            <a:off x="4690872" y="2743200"/>
-            <a:ext cx="1728216" cy="393192"/>
+            <a:off x="4690872" y="2670048"/>
+            <a:ext cx="1728216" cy="374904"/>
           </a:xfrm>
           <a:prstGeom prst="rect">
             <a:avLst/>
@@ -41383,8 +41348,8 @@
         </p:nvSpPr>
         <p:spPr>
           <a:xfrm>
-            <a:off x="6446520" y="2743200"/>
-            <a:ext cx="1600200" cy="393192"/>
+            <a:off x="6446520" y="2670048"/>
+            <a:ext cx="1600200" cy="374904"/>
           </a:xfrm>
           <a:prstGeom prst="rect">
             <a:avLst/>
@@ -41429,8 +41394,8 @@
         </p:nvSpPr>
         <p:spPr>
           <a:xfrm>
-            <a:off x="6473952" y="2743200"/>
-            <a:ext cx="1545336" cy="393192"/>
+            <a:off x="6473952" y="2670048"/>
+            <a:ext cx="1545336" cy="374904"/>
           </a:xfrm>
           <a:prstGeom prst="rect">
             <a:avLst/>
@@ -41464,8 +41429,8 @@
         </p:nvSpPr>
         <p:spPr>
           <a:xfrm>
-            <a:off x="8046720" y="2743200"/>
-            <a:ext cx="1783080" cy="393192"/>
+            <a:off x="8046720" y="2670048"/>
+            <a:ext cx="1783080" cy="374904"/>
           </a:xfrm>
           <a:prstGeom prst="rect">
             <a:avLst/>
@@ -41510,8 +41475,8 @@
         </p:nvSpPr>
         <p:spPr>
           <a:xfrm>
-            <a:off x="8074152" y="2743200"/>
-            <a:ext cx="1728216" cy="393192"/>
+            <a:off x="8074152" y="2670048"/>
+            <a:ext cx="1728216" cy="374904"/>
           </a:xfrm>
           <a:prstGeom prst="rect">
             <a:avLst/>
@@ -41545,8 +41510,8 @@
         </p:nvSpPr>
         <p:spPr>
           <a:xfrm>
-            <a:off x="9829800" y="2743200"/>
-            <a:ext cx="1627632" cy="393192"/>
+            <a:off x="9829800" y="2670048"/>
+            <a:ext cx="1627632" cy="374904"/>
           </a:xfrm>
           <a:prstGeom prst="rect">
             <a:avLst/>
@@ -41591,8 +41556,8 @@
         </p:nvSpPr>
         <p:spPr>
           <a:xfrm>
-            <a:off x="9857232" y="2743200"/>
-            <a:ext cx="1572768" cy="393192"/>
+            <a:off x="9857232" y="2670048"/>
+            <a:ext cx="1572768" cy="374904"/>
           </a:xfrm>
           <a:prstGeom prst="rect">
             <a:avLst/>
@@ -41626,8 +41591,8 @@
         </p:nvSpPr>
         <p:spPr>
           <a:xfrm>
-            <a:off x="365760" y="3136392"/>
-            <a:ext cx="548640" cy="393192"/>
+            <a:off x="365760" y="3044952"/>
+            <a:ext cx="548640" cy="374904"/>
           </a:xfrm>
           <a:prstGeom prst="rect">
             <a:avLst/>
@@ -41672,8 +41637,8 @@
         </p:nvSpPr>
         <p:spPr>
           <a:xfrm>
-            <a:off x="393192" y="3136392"/>
-            <a:ext cx="493776" cy="393192"/>
+            <a:off x="393192" y="3044952"/>
+            <a:ext cx="493776" cy="374904"/>
           </a:xfrm>
           <a:prstGeom prst="rect">
             <a:avLst/>
@@ -41707,8 +41672,8 @@
         </p:nvSpPr>
         <p:spPr>
           <a:xfrm>
-            <a:off x="914400" y="3136392"/>
-            <a:ext cx="2834640" cy="393192"/>
+            <a:off x="914400" y="3044952"/>
+            <a:ext cx="2834640" cy="374904"/>
           </a:xfrm>
           <a:prstGeom prst="rect">
             <a:avLst/>
@@ -41753,8 +41718,8 @@
         </p:nvSpPr>
         <p:spPr>
           <a:xfrm>
-            <a:off x="1005840" y="3136392"/>
-            <a:ext cx="2651760" cy="393192"/>
+            <a:off x="1005840" y="3044952"/>
+            <a:ext cx="2651760" cy="374904"/>
           </a:xfrm>
           <a:prstGeom prst="rect">
             <a:avLst/>
@@ -41788,8 +41753,8 @@
         </p:nvSpPr>
         <p:spPr>
           <a:xfrm>
-            <a:off x="3749039" y="3136392"/>
-            <a:ext cx="914400" cy="393192"/>
+            <a:off x="3749039" y="3044952"/>
+            <a:ext cx="914400" cy="374904"/>
           </a:xfrm>
           <a:prstGeom prst="rect">
             <a:avLst/>
@@ -41834,8 +41799,8 @@
         </p:nvSpPr>
         <p:spPr>
           <a:xfrm>
-            <a:off x="3776472" y="3136392"/>
-            <a:ext cx="859536" cy="393192"/>
+            <a:off x="3776472" y="3044952"/>
+            <a:ext cx="859536" cy="374904"/>
           </a:xfrm>
           <a:prstGeom prst="rect">
             <a:avLst/>
@@ -41869,8 +41834,8 @@
         </p:nvSpPr>
         <p:spPr>
           <a:xfrm>
-            <a:off x="4663440" y="3136392"/>
-            <a:ext cx="1783080" cy="393192"/>
+            <a:off x="4663440" y="3044952"/>
+            <a:ext cx="1783080" cy="374904"/>
           </a:xfrm>
           <a:prstGeom prst="rect">
             <a:avLst/>
@@ -41915,8 +41880,8 @@
         </p:nvSpPr>
         <p:spPr>
           <a:xfrm>
-            <a:off x="4690872" y="3136392"/>
-            <a:ext cx="1728216" cy="393192"/>
+            <a:off x="4690872" y="3044952"/>
+            <a:ext cx="1728216" cy="374904"/>
           </a:xfrm>
           <a:prstGeom prst="rect">
             <a:avLst/>
@@ -41950,8 +41915,8 @@
         </p:nvSpPr>
         <p:spPr>
           <a:xfrm>
-            <a:off x="6446520" y="3136392"/>
-            <a:ext cx="1600200" cy="393192"/>
+            <a:off x="6446520" y="3044952"/>
+            <a:ext cx="1600200" cy="374904"/>
           </a:xfrm>
           <a:prstGeom prst="rect">
             <a:avLst/>
@@ -41996,8 +41961,8 @@
         </p:nvSpPr>
         <p:spPr>
           <a:xfrm>
-            <a:off x="6473952" y="3136392"/>
-            <a:ext cx="1545336" cy="393192"/>
+            <a:off x="6473952" y="3044952"/>
+            <a:ext cx="1545336" cy="374904"/>
           </a:xfrm>
           <a:prstGeom prst="rect">
             <a:avLst/>
@@ -42031,8 +41996,8 @@
         </p:nvSpPr>
         <p:spPr>
           <a:xfrm>
-            <a:off x="8046720" y="3136392"/>
-            <a:ext cx="1783080" cy="393192"/>
+            <a:off x="8046720" y="3044952"/>
+            <a:ext cx="1783080" cy="374904"/>
           </a:xfrm>
           <a:prstGeom prst="rect">
             <a:avLst/>
@@ -42077,8 +42042,8 @@
         </p:nvSpPr>
         <p:spPr>
           <a:xfrm>
-            <a:off x="8074152" y="3136392"/>
-            <a:ext cx="1728216" cy="393192"/>
+            <a:off x="8074152" y="3044952"/>
+            <a:ext cx="1728216" cy="374904"/>
           </a:xfrm>
           <a:prstGeom prst="rect">
             <a:avLst/>
@@ -42112,8 +42077,8 @@
         </p:nvSpPr>
         <p:spPr>
           <a:xfrm>
-            <a:off x="9829800" y="3136392"/>
-            <a:ext cx="1627632" cy="393192"/>
+            <a:off x="9829800" y="3044952"/>
+            <a:ext cx="1627632" cy="374904"/>
           </a:xfrm>
           <a:prstGeom prst="rect">
             <a:avLst/>
@@ -42158,8 +42123,8 @@
         </p:nvSpPr>
         <p:spPr>
           <a:xfrm>
-            <a:off x="9857232" y="3136392"/>
-            <a:ext cx="1572768" cy="393192"/>
+            <a:off x="9857232" y="3044952"/>
+            <a:ext cx="1572768" cy="374904"/>
           </a:xfrm>
           <a:prstGeom prst="rect">
             <a:avLst/>
@@ -42193,8 +42158,8 @@
         </p:nvSpPr>
         <p:spPr>
           <a:xfrm>
-            <a:off x="365760" y="3529584"/>
-            <a:ext cx="548640" cy="393192"/>
+            <a:off x="365760" y="3419856"/>
+            <a:ext cx="548640" cy="374904"/>
           </a:xfrm>
           <a:prstGeom prst="rect">
             <a:avLst/>
@@ -42239,8 +42204,8 @@
         </p:nvSpPr>
         <p:spPr>
           <a:xfrm>
-            <a:off x="393192" y="3529584"/>
-            <a:ext cx="493776" cy="393192"/>
+            <a:off x="393192" y="3419856"/>
+            <a:ext cx="493776" cy="374904"/>
           </a:xfrm>
           <a:prstGeom prst="rect">
             <a:avLst/>
@@ -42274,8 +42239,8 @@
         </p:nvSpPr>
         <p:spPr>
           <a:xfrm>
-            <a:off x="914400" y="3529584"/>
-            <a:ext cx="2834640" cy="393192"/>
+            <a:off x="914400" y="3419856"/>
+            <a:ext cx="2834640" cy="374904"/>
           </a:xfrm>
           <a:prstGeom prst="rect">
             <a:avLst/>
@@ -42320,8 +42285,8 @@
         </p:nvSpPr>
         <p:spPr>
           <a:xfrm>
-            <a:off x="1005840" y="3529584"/>
-            <a:ext cx="2651760" cy="393192"/>
+            <a:off x="1005840" y="3419856"/>
+            <a:ext cx="2651760" cy="374904"/>
           </a:xfrm>
           <a:prstGeom prst="rect">
             <a:avLst/>
@@ -42355,8 +42320,8 @@
         </p:nvSpPr>
         <p:spPr>
           <a:xfrm>
-            <a:off x="3749039" y="3529584"/>
-            <a:ext cx="914400" cy="393192"/>
+            <a:off x="3749039" y="3419856"/>
+            <a:ext cx="914400" cy="374904"/>
           </a:xfrm>
           <a:prstGeom prst="rect">
             <a:avLst/>
@@ -42401,8 +42366,8 @@
         </p:nvSpPr>
         <p:spPr>
           <a:xfrm>
-            <a:off x="3776472" y="3529584"/>
-            <a:ext cx="859536" cy="393192"/>
+            <a:off x="3776472" y="3419856"/>
+            <a:ext cx="859536" cy="374904"/>
           </a:xfrm>
           <a:prstGeom prst="rect">
             <a:avLst/>
@@ -42436,8 +42401,8 @@
         </p:nvSpPr>
         <p:spPr>
           <a:xfrm>
-            <a:off x="4663440" y="3529584"/>
-            <a:ext cx="1783080" cy="393192"/>
+            <a:off x="4663440" y="3419856"/>
+            <a:ext cx="1783080" cy="374904"/>
           </a:xfrm>
           <a:prstGeom prst="rect">
             <a:avLst/>
@@ -42482,8 +42447,8 @@
         </p:nvSpPr>
         <p:spPr>
           <a:xfrm>
-            <a:off x="4690872" y="3529584"/>
-            <a:ext cx="1728216" cy="393192"/>
+            <a:off x="4690872" y="3419856"/>
+            <a:ext cx="1728216" cy="374904"/>
           </a:xfrm>
           <a:prstGeom prst="rect">
             <a:avLst/>
@@ -42517,8 +42482,8 @@
         </p:nvSpPr>
         <p:spPr>
           <a:xfrm>
-            <a:off x="6446520" y="3529584"/>
-            <a:ext cx="1600200" cy="393192"/>
+            <a:off x="6446520" y="3419856"/>
+            <a:ext cx="1600200" cy="374904"/>
           </a:xfrm>
           <a:prstGeom prst="rect">
             <a:avLst/>
@@ -42563,8 +42528,8 @@
         </p:nvSpPr>
         <p:spPr>
           <a:xfrm>
-            <a:off x="6473952" y="3529584"/>
-            <a:ext cx="1545336" cy="393192"/>
+            <a:off x="6473952" y="3419856"/>
+            <a:ext cx="1545336" cy="374904"/>
           </a:xfrm>
           <a:prstGeom prst="rect">
             <a:avLst/>
@@ -42598,8 +42563,8 @@
         </p:nvSpPr>
         <p:spPr>
           <a:xfrm>
-            <a:off x="8046720" y="3529584"/>
-            <a:ext cx="1783080" cy="393192"/>
+            <a:off x="8046720" y="3419856"/>
+            <a:ext cx="1783080" cy="374904"/>
           </a:xfrm>
           <a:prstGeom prst="rect">
             <a:avLst/>
@@ -42644,8 +42609,8 @@
         </p:nvSpPr>
         <p:spPr>
           <a:xfrm>
-            <a:off x="8074152" y="3529584"/>
-            <a:ext cx="1728216" cy="393192"/>
+            <a:off x="8074152" y="3419856"/>
+            <a:ext cx="1728216" cy="374904"/>
           </a:xfrm>
           <a:prstGeom prst="rect">
             <a:avLst/>
@@ -42679,8 +42644,8 @@
         </p:nvSpPr>
         <p:spPr>
           <a:xfrm>
-            <a:off x="9829800" y="3529584"/>
-            <a:ext cx="1627632" cy="393192"/>
+            <a:off x="9829800" y="3419856"/>
+            <a:ext cx="1627632" cy="374904"/>
           </a:xfrm>
           <a:prstGeom prst="rect">
             <a:avLst/>
@@ -42725,8 +42690,8 @@
         </p:nvSpPr>
         <p:spPr>
           <a:xfrm>
-            <a:off x="9857232" y="3529584"/>
-            <a:ext cx="1572768" cy="393192"/>
+            <a:off x="9857232" y="3419856"/>
+            <a:ext cx="1572768" cy="374904"/>
           </a:xfrm>
           <a:prstGeom prst="rect">
             <a:avLst/>
@@ -42760,8 +42725,8 @@
         </p:nvSpPr>
         <p:spPr>
           <a:xfrm>
-            <a:off x="365760" y="3922776"/>
-            <a:ext cx="548640" cy="393192"/>
+            <a:off x="365760" y="3794760"/>
+            <a:ext cx="548640" cy="374904"/>
           </a:xfrm>
           <a:prstGeom prst="rect">
             <a:avLst/>
@@ -42806,8 +42771,8 @@
         </p:nvSpPr>
         <p:spPr>
           <a:xfrm>
-            <a:off x="393192" y="3922776"/>
-            <a:ext cx="493776" cy="393192"/>
+            <a:off x="393192" y="3794760"/>
+            <a:ext cx="493776" cy="374904"/>
           </a:xfrm>
           <a:prstGeom prst="rect">
             <a:avLst/>
@@ -42841,8 +42806,8 @@
         </p:nvSpPr>
         <p:spPr>
           <a:xfrm>
-            <a:off x="914400" y="3922776"/>
-            <a:ext cx="2834640" cy="393192"/>
+            <a:off x="914400" y="3794760"/>
+            <a:ext cx="2834640" cy="374904"/>
           </a:xfrm>
           <a:prstGeom prst="rect">
             <a:avLst/>
@@ -42887,8 +42852,8 @@
         </p:nvSpPr>
         <p:spPr>
           <a:xfrm>
-            <a:off x="1005840" y="3922776"/>
-            <a:ext cx="2651760" cy="393192"/>
+            <a:off x="1005840" y="3794760"/>
+            <a:ext cx="2651760" cy="374904"/>
           </a:xfrm>
           <a:prstGeom prst="rect">
             <a:avLst/>
@@ -42922,8 +42887,8 @@
         </p:nvSpPr>
         <p:spPr>
           <a:xfrm>
-            <a:off x="3749039" y="3922776"/>
-            <a:ext cx="914400" cy="393192"/>
+            <a:off x="3749039" y="3794760"/>
+            <a:ext cx="914400" cy="374904"/>
           </a:xfrm>
           <a:prstGeom prst="rect">
             <a:avLst/>
@@ -42968,8 +42933,8 @@
         </p:nvSpPr>
         <p:spPr>
           <a:xfrm>
-            <a:off x="3776472" y="3922776"/>
-            <a:ext cx="859536" cy="393192"/>
+            <a:off x="3776472" y="3794760"/>
+            <a:ext cx="859536" cy="374904"/>
           </a:xfrm>
           <a:prstGeom prst="rect">
             <a:avLst/>
@@ -43003,8 +42968,8 @@
         </p:nvSpPr>
         <p:spPr>
           <a:xfrm>
-            <a:off x="4663440" y="3922776"/>
-            <a:ext cx="1783080" cy="393192"/>
+            <a:off x="4663440" y="3794760"/>
+            <a:ext cx="1783080" cy="374904"/>
           </a:xfrm>
           <a:prstGeom prst="rect">
             <a:avLst/>
@@ -43049,8 +43014,8 @@
         </p:nvSpPr>
         <p:spPr>
           <a:xfrm>
-            <a:off x="4690872" y="3922776"/>
-            <a:ext cx="1728216" cy="393192"/>
+            <a:off x="4690872" y="3794760"/>
+            <a:ext cx="1728216" cy="374904"/>
           </a:xfrm>
           <a:prstGeom prst="rect">
             <a:avLst/>
@@ -43084,8 +43049,8 @@
         </p:nvSpPr>
         <p:spPr>
           <a:xfrm>
-            <a:off x="6446520" y="3922776"/>
-            <a:ext cx="1600200" cy="393192"/>
+            <a:off x="6446520" y="3794760"/>
+            <a:ext cx="1600200" cy="374904"/>
           </a:xfrm>
           <a:prstGeom prst="rect">
             <a:avLst/>
@@ -43130,8 +43095,8 @@
         </p:nvSpPr>
         <p:spPr>
           <a:xfrm>
-            <a:off x="6473952" y="3922776"/>
-            <a:ext cx="1545336" cy="393192"/>
+            <a:off x="6473952" y="3794760"/>
+            <a:ext cx="1545336" cy="374904"/>
           </a:xfrm>
           <a:prstGeom prst="rect">
             <a:avLst/>
@@ -43165,8 +43130,8 @@
         </p:nvSpPr>
         <p:spPr>
           <a:xfrm>
-            <a:off x="8046720" y="3922776"/>
-            <a:ext cx="1783080" cy="393192"/>
+            <a:off x="8046720" y="3794760"/>
+            <a:ext cx="1783080" cy="374904"/>
           </a:xfrm>
           <a:prstGeom prst="rect">
             <a:avLst/>
@@ -43211,8 +43176,8 @@
         </p:nvSpPr>
         <p:spPr>
           <a:xfrm>
-            <a:off x="8074152" y="3922776"/>
-            <a:ext cx="1728216" cy="393192"/>
+            <a:off x="8074152" y="3794760"/>
+            <a:ext cx="1728216" cy="374904"/>
           </a:xfrm>
           <a:prstGeom prst="rect">
             <a:avLst/>
@@ -43246,8 +43211,8 @@
         </p:nvSpPr>
         <p:spPr>
           <a:xfrm>
-            <a:off x="9829800" y="3922776"/>
-            <a:ext cx="1627632" cy="393192"/>
+            <a:off x="9829800" y="3794760"/>
+            <a:ext cx="1627632" cy="374904"/>
           </a:xfrm>
           <a:prstGeom prst="rect">
             <a:avLst/>
@@ -43292,8 +43257,8 @@
         </p:nvSpPr>
         <p:spPr>
           <a:xfrm>
-            <a:off x="9857232" y="3922776"/>
-            <a:ext cx="1572768" cy="393192"/>
+            <a:off x="9857232" y="3794760"/>
+            <a:ext cx="1572768" cy="374904"/>
           </a:xfrm>
           <a:prstGeom prst="rect">
             <a:avLst/>
@@ -43327,8 +43292,8 @@
         </p:nvSpPr>
         <p:spPr>
           <a:xfrm>
-            <a:off x="365760" y="4315968"/>
-            <a:ext cx="548640" cy="393192"/>
+            <a:off x="365760" y="4169664"/>
+            <a:ext cx="548640" cy="374904"/>
           </a:xfrm>
           <a:prstGeom prst="rect">
             <a:avLst/>
@@ -43373,8 +43338,8 @@
         </p:nvSpPr>
         <p:spPr>
           <a:xfrm>
-            <a:off x="393192" y="4315968"/>
-            <a:ext cx="493776" cy="393192"/>
+            <a:off x="393192" y="4169664"/>
+            <a:ext cx="493776" cy="374904"/>
           </a:xfrm>
           <a:prstGeom prst="rect">
             <a:avLst/>
@@ -43408,8 +43373,8 @@
         </p:nvSpPr>
         <p:spPr>
           <a:xfrm>
-            <a:off x="914400" y="4315968"/>
-            <a:ext cx="2834640" cy="393192"/>
+            <a:off x="914400" y="4169664"/>
+            <a:ext cx="2834640" cy="374904"/>
           </a:xfrm>
           <a:prstGeom prst="rect">
             <a:avLst/>
@@ -43454,8 +43419,8 @@
         </p:nvSpPr>
         <p:spPr>
           <a:xfrm>
-            <a:off x="1005840" y="4315968"/>
-            <a:ext cx="2651760" cy="393192"/>
+            <a:off x="1005840" y="4169664"/>
+            <a:ext cx="2651760" cy="374904"/>
           </a:xfrm>
           <a:prstGeom prst="rect">
             <a:avLst/>
@@ -43489,8 +43454,8 @@
         </p:nvSpPr>
         <p:spPr>
           <a:xfrm>
-            <a:off x="3749039" y="4315968"/>
-            <a:ext cx="914400" cy="393192"/>
+            <a:off x="3749039" y="4169664"/>
+            <a:ext cx="914400" cy="374904"/>
           </a:xfrm>
           <a:prstGeom prst="rect">
             <a:avLst/>
@@ -43535,8 +43500,8 @@
         </p:nvSpPr>
         <p:spPr>
           <a:xfrm>
-            <a:off x="3776472" y="4315968"/>
-            <a:ext cx="859536" cy="393192"/>
+            <a:off x="3776472" y="4169664"/>
+            <a:ext cx="859536" cy="374904"/>
           </a:xfrm>
           <a:prstGeom prst="rect">
             <a:avLst/>
@@ -43570,8 +43535,8 @@
         </p:nvSpPr>
         <p:spPr>
           <a:xfrm>
-            <a:off x="4663440" y="4315968"/>
-            <a:ext cx="1783080" cy="393192"/>
+            <a:off x="4663440" y="4169664"/>
+            <a:ext cx="1783080" cy="374904"/>
           </a:xfrm>
           <a:prstGeom prst="rect">
             <a:avLst/>
@@ -43616,8 +43581,8 @@
         </p:nvSpPr>
         <p:spPr>
           <a:xfrm>
-            <a:off x="4690872" y="4315968"/>
-            <a:ext cx="1728216" cy="393192"/>
+            <a:off x="4690872" y="4169664"/>
+            <a:ext cx="1728216" cy="374904"/>
           </a:xfrm>
           <a:prstGeom prst="rect">
             <a:avLst/>
@@ -43651,8 +43616,8 @@
         </p:nvSpPr>
         <p:spPr>
           <a:xfrm>
-            <a:off x="6446520" y="4315968"/>
-            <a:ext cx="1600200" cy="393192"/>
+            <a:off x="6446520" y="4169664"/>
+            <a:ext cx="1600200" cy="374904"/>
           </a:xfrm>
           <a:prstGeom prst="rect">
             <a:avLst/>
@@ -43697,8 +43662,8 @@
         </p:nvSpPr>
         <p:spPr>
           <a:xfrm>
-            <a:off x="6473952" y="4315968"/>
-            <a:ext cx="1545336" cy="393192"/>
+            <a:off x="6473952" y="4169664"/>
+            <a:ext cx="1545336" cy="374904"/>
           </a:xfrm>
           <a:prstGeom prst="rect">
             <a:avLst/>
@@ -43732,8 +43697,8 @@
         </p:nvSpPr>
         <p:spPr>
           <a:xfrm>
-            <a:off x="8046720" y="4315968"/>
-            <a:ext cx="1783080" cy="393192"/>
+            <a:off x="8046720" y="4169664"/>
+            <a:ext cx="1783080" cy="374904"/>
           </a:xfrm>
           <a:prstGeom prst="rect">
             <a:avLst/>
@@ -43778,8 +43743,8 @@
         </p:nvSpPr>
         <p:spPr>
           <a:xfrm>
-            <a:off x="8074152" y="4315968"/>
-            <a:ext cx="1728216" cy="393192"/>
+            <a:off x="8074152" y="4169664"/>
+            <a:ext cx="1728216" cy="374904"/>
           </a:xfrm>
           <a:prstGeom prst="rect">
             <a:avLst/>
@@ -43813,8 +43778,8 @@
         </p:nvSpPr>
         <p:spPr>
           <a:xfrm>
-            <a:off x="9829800" y="4315968"/>
-            <a:ext cx="1627632" cy="393192"/>
+            <a:off x="9829800" y="4169664"/>
+            <a:ext cx="1627632" cy="374904"/>
           </a:xfrm>
           <a:prstGeom prst="rect">
             <a:avLst/>
@@ -43859,8 +43824,8 @@
         </p:nvSpPr>
         <p:spPr>
           <a:xfrm>
-            <a:off x="9857232" y="4315968"/>
-            <a:ext cx="1572768" cy="393192"/>
+            <a:off x="9857232" y="4169664"/>
+            <a:ext cx="1572768" cy="374904"/>
           </a:xfrm>
           <a:prstGeom prst="rect">
             <a:avLst/>
@@ -43894,8 +43859,8 @@
         </p:nvSpPr>
         <p:spPr>
           <a:xfrm>
-            <a:off x="365760" y="4709160"/>
-            <a:ext cx="548640" cy="393192"/>
+            <a:off x="365760" y="4544568"/>
+            <a:ext cx="548640" cy="374904"/>
           </a:xfrm>
           <a:prstGeom prst="rect">
             <a:avLst/>
@@ -43940,8 +43905,8 @@
         </p:nvSpPr>
         <p:spPr>
           <a:xfrm>
-            <a:off x="393192" y="4709160"/>
-            <a:ext cx="493776" cy="393192"/>
+            <a:off x="393192" y="4544568"/>
+            <a:ext cx="493776" cy="374904"/>
           </a:xfrm>
           <a:prstGeom prst="rect">
             <a:avLst/>
@@ -43975,8 +43940,8 @@
         </p:nvSpPr>
         <p:spPr>
           <a:xfrm>
-            <a:off x="914400" y="4709160"/>
-            <a:ext cx="2834640" cy="393192"/>
+            <a:off x="914400" y="4544568"/>
+            <a:ext cx="2834640" cy="374904"/>
           </a:xfrm>
           <a:prstGeom prst="rect">
             <a:avLst/>
@@ -44021,8 +43986,8 @@
         </p:nvSpPr>
         <p:spPr>
           <a:xfrm>
-            <a:off x="1005840" y="4709160"/>
-            <a:ext cx="2651760" cy="393192"/>
+            <a:off x="1005840" y="4544568"/>
+            <a:ext cx="2651760" cy="374904"/>
           </a:xfrm>
           <a:prstGeom prst="rect">
             <a:avLst/>
@@ -44056,8 +44021,8 @@
         </p:nvSpPr>
         <p:spPr>
           <a:xfrm>
-            <a:off x="3749039" y="4709160"/>
-            <a:ext cx="914400" cy="393192"/>
+            <a:off x="3749039" y="4544568"/>
+            <a:ext cx="914400" cy="374904"/>
           </a:xfrm>
           <a:prstGeom prst="rect">
             <a:avLst/>
@@ -44102,8 +44067,8 @@
         </p:nvSpPr>
         <p:spPr>
           <a:xfrm>
-            <a:off x="3776472" y="4709160"/>
-            <a:ext cx="859536" cy="393192"/>
+            <a:off x="3776472" y="4544568"/>
+            <a:ext cx="859536" cy="374904"/>
           </a:xfrm>
           <a:prstGeom prst="rect">
             <a:avLst/>
@@ -44137,8 +44102,8 @@
         </p:nvSpPr>
         <p:spPr>
           <a:xfrm>
-            <a:off x="4663440" y="4709160"/>
-            <a:ext cx="1783080" cy="393192"/>
+            <a:off x="4663440" y="4544568"/>
+            <a:ext cx="1783080" cy="374904"/>
           </a:xfrm>
           <a:prstGeom prst="rect">
             <a:avLst/>
@@ -44183,8 +44148,8 @@
         </p:nvSpPr>
         <p:spPr>
           <a:xfrm>
-            <a:off x="4690872" y="4709160"/>
-            <a:ext cx="1728216" cy="393192"/>
+            <a:off x="4690872" y="4544568"/>
+            <a:ext cx="1728216" cy="374904"/>
           </a:xfrm>
           <a:prstGeom prst="rect">
             <a:avLst/>
@@ -44218,8 +44183,8 @@
         </p:nvSpPr>
         <p:spPr>
           <a:xfrm>
-            <a:off x="6446520" y="4709160"/>
-            <a:ext cx="1600200" cy="393192"/>
+            <a:off x="6446520" y="4544568"/>
+            <a:ext cx="1600200" cy="374904"/>
           </a:xfrm>
           <a:prstGeom prst="rect">
             <a:avLst/>
@@ -44264,8 +44229,8 @@
         </p:nvSpPr>
         <p:spPr>
           <a:xfrm>
-            <a:off x="6473952" y="4709160"/>
-            <a:ext cx="1545336" cy="393192"/>
+            <a:off x="6473952" y="4544568"/>
+            <a:ext cx="1545336" cy="374904"/>
           </a:xfrm>
           <a:prstGeom prst="rect">
             <a:avLst/>
@@ -44299,8 +44264,8 @@
         </p:nvSpPr>
         <p:spPr>
           <a:xfrm>
-            <a:off x="8046720" y="4709160"/>
-            <a:ext cx="1783080" cy="393192"/>
+            <a:off x="8046720" y="4544568"/>
+            <a:ext cx="1783080" cy="374904"/>
           </a:xfrm>
           <a:prstGeom prst="rect">
             <a:avLst/>
@@ -44345,8 +44310,8 @@
         </p:nvSpPr>
         <p:spPr>
           <a:xfrm>
-            <a:off x="8074152" y="4709160"/>
-            <a:ext cx="1728216" cy="393192"/>
+            <a:off x="8074152" y="4544568"/>
+            <a:ext cx="1728216" cy="374904"/>
           </a:xfrm>
           <a:prstGeom prst="rect">
             <a:avLst/>
@@ -44380,8 +44345,8 @@
         </p:nvSpPr>
         <p:spPr>
           <a:xfrm>
-            <a:off x="9829800" y="4709160"/>
-            <a:ext cx="1627632" cy="393192"/>
+            <a:off x="9829800" y="4544568"/>
+            <a:ext cx="1627632" cy="374904"/>
           </a:xfrm>
           <a:prstGeom prst="rect">
             <a:avLst/>
@@ -44426,8 +44391,8 @@
         </p:nvSpPr>
         <p:spPr>
           <a:xfrm>
-            <a:off x="9857232" y="4709160"/>
-            <a:ext cx="1572768" cy="393192"/>
+            <a:off x="9857232" y="4544568"/>
+            <a:ext cx="1572768" cy="374904"/>
           </a:xfrm>
           <a:prstGeom prst="rect">
             <a:avLst/>
@@ -44461,8 +44426,8 @@
         </p:nvSpPr>
         <p:spPr>
           <a:xfrm>
-            <a:off x="365760" y="5102352"/>
-            <a:ext cx="548640" cy="393192"/>
+            <a:off x="365760" y="4919472"/>
+            <a:ext cx="548640" cy="374904"/>
           </a:xfrm>
           <a:prstGeom prst="rect">
             <a:avLst/>
@@ -44507,8 +44472,8 @@
         </p:nvSpPr>
         <p:spPr>
           <a:xfrm>
-            <a:off x="393192" y="5102352"/>
-            <a:ext cx="493776" cy="393192"/>
+            <a:off x="393192" y="4919472"/>
+            <a:ext cx="493776" cy="374904"/>
           </a:xfrm>
           <a:prstGeom prst="rect">
             <a:avLst/>
@@ -44542,8 +44507,8 @@
         </p:nvSpPr>
         <p:spPr>
           <a:xfrm>
-            <a:off x="914400" y="5102352"/>
-            <a:ext cx="2834640" cy="393192"/>
+            <a:off x="914400" y="4919472"/>
+            <a:ext cx="2834640" cy="374904"/>
           </a:xfrm>
           <a:prstGeom prst="rect">
             <a:avLst/>
@@ -44588,8 +44553,8 @@
         </p:nvSpPr>
         <p:spPr>
           <a:xfrm>
-            <a:off x="1005840" y="5102352"/>
-            <a:ext cx="2651760" cy="393192"/>
+            <a:off x="1005840" y="4919472"/>
+            <a:ext cx="2651760" cy="374904"/>
           </a:xfrm>
           <a:prstGeom prst="rect">
             <a:avLst/>
@@ -44623,8 +44588,8 @@
         </p:nvSpPr>
         <p:spPr>
           <a:xfrm>
-            <a:off x="3749039" y="5102352"/>
-            <a:ext cx="914400" cy="393192"/>
+            <a:off x="3749039" y="4919472"/>
+            <a:ext cx="914400" cy="374904"/>
           </a:xfrm>
           <a:prstGeom prst="rect">
             <a:avLst/>
@@ -44669,8 +44634,8 @@
         </p:nvSpPr>
         <p:spPr>
           <a:xfrm>
-            <a:off x="3776472" y="5102352"/>
-            <a:ext cx="859536" cy="393192"/>
+            <a:off x="3776472" y="4919472"/>
+            <a:ext cx="859536" cy="374904"/>
           </a:xfrm>
           <a:prstGeom prst="rect">
             <a:avLst/>
@@ -44704,8 +44669,8 @@
         </p:nvSpPr>
         <p:spPr>
           <a:xfrm>
-            <a:off x="4663440" y="5102352"/>
-            <a:ext cx="1783080" cy="393192"/>
+            <a:off x="4663440" y="4919472"/>
+            <a:ext cx="1783080" cy="374904"/>
           </a:xfrm>
           <a:prstGeom prst="rect">
             <a:avLst/>
@@ -44750,8 +44715,8 @@
         </p:nvSpPr>
         <p:spPr>
           <a:xfrm>
-            <a:off x="4690872" y="5102352"/>
-            <a:ext cx="1728216" cy="393192"/>
+            <a:off x="4690872" y="4919472"/>
+            <a:ext cx="1728216" cy="374904"/>
           </a:xfrm>
           <a:prstGeom prst="rect">
             <a:avLst/>
@@ -44785,8 +44750,8 @@
         </p:nvSpPr>
         <p:spPr>
           <a:xfrm>
-            <a:off x="6446520" y="5102352"/>
-            <a:ext cx="1600200" cy="393192"/>
+            <a:off x="6446520" y="4919472"/>
+            <a:ext cx="1600200" cy="374904"/>
           </a:xfrm>
           <a:prstGeom prst="rect">
             <a:avLst/>
@@ -44831,8 +44796,8 @@
         </p:nvSpPr>
         <p:spPr>
           <a:xfrm>
-            <a:off x="6473952" y="5102352"/>
-            <a:ext cx="1545336" cy="393192"/>
+            <a:off x="6473952" y="4919472"/>
+            <a:ext cx="1545336" cy="374904"/>
           </a:xfrm>
           <a:prstGeom prst="rect">
             <a:avLst/>
@@ -44866,8 +44831,8 @@
         </p:nvSpPr>
         <p:spPr>
           <a:xfrm>
-            <a:off x="8046720" y="5102352"/>
-            <a:ext cx="1783080" cy="393192"/>
+            <a:off x="8046720" y="4919472"/>
+            <a:ext cx="1783080" cy="374904"/>
           </a:xfrm>
           <a:prstGeom prst="rect">
             <a:avLst/>
@@ -44912,8 +44877,8 @@
         </p:nvSpPr>
         <p:spPr>
           <a:xfrm>
-            <a:off x="8074152" y="5102352"/>
-            <a:ext cx="1728216" cy="393192"/>
+            <a:off x="8074152" y="4919472"/>
+            <a:ext cx="1728216" cy="374904"/>
           </a:xfrm>
           <a:prstGeom prst="rect">
             <a:avLst/>
@@ -44947,8 +44912,8 @@
         </p:nvSpPr>
         <p:spPr>
           <a:xfrm>
-            <a:off x="9829800" y="5102352"/>
-            <a:ext cx="1627632" cy="393192"/>
+            <a:off x="9829800" y="4919472"/>
+            <a:ext cx="1627632" cy="374904"/>
           </a:xfrm>
           <a:prstGeom prst="rect">
             <a:avLst/>
@@ -44993,8 +44958,8 @@
         </p:nvSpPr>
         <p:spPr>
           <a:xfrm>
-            <a:off x="9857232" y="5102352"/>
-            <a:ext cx="1572768" cy="393192"/>
+            <a:off x="9857232" y="4919472"/>
+            <a:ext cx="1572768" cy="374904"/>
           </a:xfrm>
           <a:prstGeom prst="rect">
             <a:avLst/>
@@ -45028,8 +44993,8 @@
         </p:nvSpPr>
         <p:spPr>
           <a:xfrm>
-            <a:off x="365760" y="5495544"/>
-            <a:ext cx="548640" cy="393192"/>
+            <a:off x="365760" y="5294376"/>
+            <a:ext cx="548640" cy="374904"/>
           </a:xfrm>
           <a:prstGeom prst="rect">
             <a:avLst/>
@@ -45074,8 +45039,8 @@
         </p:nvSpPr>
         <p:spPr>
           <a:xfrm>
-            <a:off x="393192" y="5495544"/>
-            <a:ext cx="493776" cy="393192"/>
+            <a:off x="393192" y="5294376"/>
+            <a:ext cx="493776" cy="374904"/>
           </a:xfrm>
           <a:prstGeom prst="rect">
             <a:avLst/>
@@ -45109,8 +45074,8 @@
         </p:nvSpPr>
         <p:spPr>
           <a:xfrm>
-            <a:off x="914400" y="5495544"/>
-            <a:ext cx="2834640" cy="393192"/>
+            <a:off x="914400" y="5294376"/>
+            <a:ext cx="2834640" cy="374904"/>
           </a:xfrm>
           <a:prstGeom prst="rect">
             <a:avLst/>
@@ -45155,8 +45120,8 @@
         </p:nvSpPr>
         <p:spPr>
           <a:xfrm>
-            <a:off x="1005840" y="5495544"/>
-            <a:ext cx="2651760" cy="393192"/>
+            <a:off x="1005840" y="5294376"/>
+            <a:ext cx="2651760" cy="374904"/>
           </a:xfrm>
           <a:prstGeom prst="rect">
             <a:avLst/>
@@ -45190,8 +45155,8 @@
         </p:nvSpPr>
         <p:spPr>
           <a:xfrm>
-            <a:off x="3749039" y="5495544"/>
-            <a:ext cx="914400" cy="393192"/>
+            <a:off x="3749039" y="5294376"/>
+            <a:ext cx="914400" cy="374904"/>
           </a:xfrm>
           <a:prstGeom prst="rect">
             <a:avLst/>
@@ -45236,8 +45201,8 @@
         </p:nvSpPr>
         <p:spPr>
           <a:xfrm>
-            <a:off x="3776472" y="5495544"/>
-            <a:ext cx="859536" cy="393192"/>
+            <a:off x="3776472" y="5294376"/>
+            <a:ext cx="859536" cy="374904"/>
           </a:xfrm>
           <a:prstGeom prst="rect">
             <a:avLst/>
@@ -45271,8 +45236,8 @@
         </p:nvSpPr>
         <p:spPr>
           <a:xfrm>
-            <a:off x="4663440" y="5495544"/>
-            <a:ext cx="1783080" cy="393192"/>
+            <a:off x="4663440" y="5294376"/>
+            <a:ext cx="1783080" cy="374904"/>
           </a:xfrm>
           <a:prstGeom prst="rect">
             <a:avLst/>
@@ -45317,8 +45282,8 @@
         </p:nvSpPr>
         <p:spPr>
           <a:xfrm>
-            <a:off x="4690872" y="5495544"/>
-            <a:ext cx="1728216" cy="393192"/>
+            <a:off x="4690872" y="5294376"/>
+            <a:ext cx="1728216" cy="374904"/>
           </a:xfrm>
           <a:prstGeom prst="rect">
             <a:avLst/>
@@ -45352,8 +45317,8 @@
         </p:nvSpPr>
         <p:spPr>
           <a:xfrm>
-            <a:off x="6446520" y="5495544"/>
-            <a:ext cx="1600200" cy="393192"/>
+            <a:off x="6446520" y="5294376"/>
+            <a:ext cx="1600200" cy="374904"/>
           </a:xfrm>
           <a:prstGeom prst="rect">
             <a:avLst/>
@@ -45398,8 +45363,8 @@
         </p:nvSpPr>
         <p:spPr>
           <a:xfrm>
-            <a:off x="6473952" y="5495544"/>
-            <a:ext cx="1545336" cy="393192"/>
+            <a:off x="6473952" y="5294376"/>
+            <a:ext cx="1545336" cy="374904"/>
           </a:xfrm>
           <a:prstGeom prst="rect">
             <a:avLst/>
@@ -45433,8 +45398,8 @@
         </p:nvSpPr>
         <p:spPr>
           <a:xfrm>
-            <a:off x="8046720" y="5495544"/>
-            <a:ext cx="1783080" cy="393192"/>
+            <a:off x="8046720" y="5294376"/>
+            <a:ext cx="1783080" cy="374904"/>
           </a:xfrm>
           <a:prstGeom prst="rect">
             <a:avLst/>
@@ -45479,8 +45444,8 @@
         </p:nvSpPr>
         <p:spPr>
           <a:xfrm>
-            <a:off x="8074152" y="5495544"/>
-            <a:ext cx="1728216" cy="393192"/>
+            <a:off x="8074152" y="5294376"/>
+            <a:ext cx="1728216" cy="374904"/>
           </a:xfrm>
           <a:prstGeom prst="rect">
             <a:avLst/>
@@ -45514,8 +45479,8 @@
         </p:nvSpPr>
         <p:spPr>
           <a:xfrm>
-            <a:off x="9829800" y="5495544"/>
-            <a:ext cx="1627632" cy="393192"/>
+            <a:off x="9829800" y="5294376"/>
+            <a:ext cx="1627632" cy="374904"/>
           </a:xfrm>
           <a:prstGeom prst="rect">
             <a:avLst/>
@@ -45560,8 +45525,8 @@
         </p:nvSpPr>
         <p:spPr>
           <a:xfrm>
-            <a:off x="9857232" y="5495544"/>
-            <a:ext cx="1572768" cy="393192"/>
+            <a:off x="9857232" y="5294376"/>
+            <a:ext cx="1572768" cy="374904"/>
           </a:xfrm>
           <a:prstGeom prst="rect">
             <a:avLst/>
@@ -45595,8 +45560,8 @@
         </p:nvSpPr>
         <p:spPr>
           <a:xfrm>
-            <a:off x="365760" y="5888736"/>
-            <a:ext cx="548640" cy="393192"/>
+            <a:off x="365760" y="5669280"/>
+            <a:ext cx="548640" cy="374904"/>
           </a:xfrm>
           <a:prstGeom prst="rect">
             <a:avLst/>
@@ -45641,8 +45606,8 @@
         </p:nvSpPr>
         <p:spPr>
           <a:xfrm>
-            <a:off x="393192" y="5888736"/>
-            <a:ext cx="493776" cy="393192"/>
+            <a:off x="393192" y="5669280"/>
+            <a:ext cx="493776" cy="374904"/>
           </a:xfrm>
           <a:prstGeom prst="rect">
             <a:avLst/>
@@ -45676,8 +45641,8 @@
         </p:nvSpPr>
         <p:spPr>
           <a:xfrm>
-            <a:off x="914400" y="5888736"/>
-            <a:ext cx="2834640" cy="393192"/>
+            <a:off x="914400" y="5669280"/>
+            <a:ext cx="2834640" cy="374904"/>
           </a:xfrm>
           <a:prstGeom prst="rect">
             <a:avLst/>
@@ -45722,8 +45687,8 @@
         </p:nvSpPr>
         <p:spPr>
           <a:xfrm>
-            <a:off x="1005840" y="5888736"/>
-            <a:ext cx="2651760" cy="393192"/>
+            <a:off x="1005840" y="5669280"/>
+            <a:ext cx="2651760" cy="374904"/>
           </a:xfrm>
           <a:prstGeom prst="rect">
             <a:avLst/>
@@ -45757,8 +45722,8 @@
         </p:nvSpPr>
         <p:spPr>
           <a:xfrm>
-            <a:off x="3749039" y="5888736"/>
-            <a:ext cx="914400" cy="393192"/>
+            <a:off x="3749039" y="5669280"/>
+            <a:ext cx="914400" cy="374904"/>
           </a:xfrm>
           <a:prstGeom prst="rect">
             <a:avLst/>
@@ -45803,8 +45768,8 @@
         </p:nvSpPr>
         <p:spPr>
           <a:xfrm>
-            <a:off x="3776472" y="5888736"/>
-            <a:ext cx="859536" cy="393192"/>
+            <a:off x="3776472" y="5669280"/>
+            <a:ext cx="859536" cy="374904"/>
           </a:xfrm>
           <a:prstGeom prst="rect">
             <a:avLst/>
@@ -45838,8 +45803,8 @@
         </p:nvSpPr>
         <p:spPr>
           <a:xfrm>
-            <a:off x="4663440" y="5888736"/>
-            <a:ext cx="1783080" cy="393192"/>
+            <a:off x="4663440" y="5669280"/>
+            <a:ext cx="1783080" cy="374904"/>
           </a:xfrm>
           <a:prstGeom prst="rect">
             <a:avLst/>
@@ -45884,8 +45849,8 @@
         </p:nvSpPr>
         <p:spPr>
           <a:xfrm>
-            <a:off x="4690872" y="5888736"/>
-            <a:ext cx="1728216" cy="393192"/>
+            <a:off x="4690872" y="5669280"/>
+            <a:ext cx="1728216" cy="374904"/>
           </a:xfrm>
           <a:prstGeom prst="rect">
             <a:avLst/>
@@ -45919,8 +45884,8 @@
         </p:nvSpPr>
         <p:spPr>
           <a:xfrm>
-            <a:off x="6446520" y="5888736"/>
-            <a:ext cx="1600200" cy="393192"/>
+            <a:off x="6446520" y="5669280"/>
+            <a:ext cx="1600200" cy="374904"/>
           </a:xfrm>
           <a:prstGeom prst="rect">
             <a:avLst/>
@@ -45965,8 +45930,8 @@
         </p:nvSpPr>
         <p:spPr>
           <a:xfrm>
-            <a:off x="6473952" y="5888736"/>
-            <a:ext cx="1545336" cy="393192"/>
+            <a:off x="6473952" y="5669280"/>
+            <a:ext cx="1545336" cy="374904"/>
           </a:xfrm>
           <a:prstGeom prst="rect">
             <a:avLst/>
@@ -46000,8 +45965,8 @@
         </p:nvSpPr>
         <p:spPr>
           <a:xfrm>
-            <a:off x="8046720" y="5888736"/>
-            <a:ext cx="1783080" cy="393192"/>
+            <a:off x="8046720" y="5669280"/>
+            <a:ext cx="1783080" cy="374904"/>
           </a:xfrm>
           <a:prstGeom prst="rect">
             <a:avLst/>
@@ -46046,8 +46011,8 @@
         </p:nvSpPr>
         <p:spPr>
           <a:xfrm>
-            <a:off x="8074152" y="5888736"/>
-            <a:ext cx="1728216" cy="393192"/>
+            <a:off x="8074152" y="5669280"/>
+            <a:ext cx="1728216" cy="374904"/>
           </a:xfrm>
           <a:prstGeom prst="rect">
             <a:avLst/>
@@ -46081,8 +46046,8 @@
         </p:nvSpPr>
         <p:spPr>
           <a:xfrm>
-            <a:off x="9829800" y="5888736"/>
-            <a:ext cx="1627632" cy="393192"/>
+            <a:off x="9829800" y="5669280"/>
+            <a:ext cx="1627632" cy="374904"/>
           </a:xfrm>
           <a:prstGeom prst="rect">
             <a:avLst/>
@@ -46127,8 +46092,8 @@
         </p:nvSpPr>
         <p:spPr>
           <a:xfrm>
-            <a:off x="9857232" y="5888736"/>
-            <a:ext cx="1572768" cy="393192"/>
+            <a:off x="9857232" y="5669280"/>
+            <a:ext cx="1572768" cy="374904"/>
           </a:xfrm>
           <a:prstGeom prst="rect">
             <a:avLst/>
@@ -46162,8 +46127,8 @@
         </p:nvSpPr>
         <p:spPr>
           <a:xfrm>
-            <a:off x="365760" y="6309360"/>
-            <a:ext cx="11430000" cy="292608"/>
+            <a:off x="365760" y="6053328"/>
+            <a:ext cx="11430000" cy="310896"/>
           </a:xfrm>
           <a:prstGeom prst="rect">
             <a:avLst/>
@@ -46242,7 +46207,7 @@
         <p:spPr>
           <a:xfrm>
             <a:off x="365760" y="6473952"/>
-            <a:ext cx="7772400" cy="292608"/>
+            <a:ext cx="4206240" cy="292608"/>
           </a:xfrm>
           <a:prstGeom prst="rect">
             <a:avLst/>
@@ -46263,7 +46228,7 @@
                 </a:solidFill>
                 <a:latin typeface="Calibri"/>
               </a:rPr>
-              <a:t>AURIS  ·  Yapay Zekâ Üretimli Müzik Tespiti</a:t>
+              <a:t>AURIS · YZ Üretimli Müzik Tespiti</a:t>
             </a:r>
           </a:p>
         </p:txBody>
@@ -46276,8 +46241,8 @@
         </p:nvSpPr>
         <p:spPr>
           <a:xfrm>
-            <a:off x="5029200" y="6473952"/>
-            <a:ext cx="6793992" cy="292608"/>
+            <a:off x="4663440" y="6473952"/>
+            <a:ext cx="7159752" cy="292608"/>
           </a:xfrm>
           <a:prstGeom prst="rect">
             <a:avLst/>
@@ -47149,7 +47114,7 @@
         <p:spPr>
           <a:xfrm>
             <a:off x="365760" y="6473952"/>
-            <a:ext cx="7772400" cy="292608"/>
+            <a:ext cx="4206240" cy="292608"/>
           </a:xfrm>
           <a:prstGeom prst="rect">
             <a:avLst/>
@@ -47170,7 +47135,7 @@
                 </a:solidFill>
                 <a:latin typeface="Calibri"/>
               </a:rPr>
-              <a:t>AURIS  ·  Yapay Zekâ Üretimli Müzik Tespiti</a:t>
+              <a:t>AURIS · YZ Üretimli Müzik Tespiti</a:t>
             </a:r>
           </a:p>
         </p:txBody>
@@ -47183,8 +47148,8 @@
         </p:nvSpPr>
         <p:spPr>
           <a:xfrm>
-            <a:off x="5029200" y="6473952"/>
-            <a:ext cx="6793992" cy="292608"/>
+            <a:off x="4663440" y="6473952"/>
+            <a:ext cx="7159752" cy="292608"/>
           </a:xfrm>
           <a:prstGeom prst="rect">
             <a:avLst/>
@@ -51257,7 +51222,7 @@
         <p:spPr>
           <a:xfrm>
             <a:off x="365760" y="6473952"/>
-            <a:ext cx="7772400" cy="292608"/>
+            <a:ext cx="4206240" cy="292608"/>
           </a:xfrm>
           <a:prstGeom prst="rect">
             <a:avLst/>
@@ -51278,7 +51243,7 @@
                 </a:solidFill>
                 <a:latin typeface="Calibri"/>
               </a:rPr>
-              <a:t>AURIS  ·  Yapay Zekâ Üretimli Müzik Tespiti</a:t>
+              <a:t>AURIS · YZ Üretimli Müzik Tespiti</a:t>
             </a:r>
           </a:p>
         </p:txBody>
@@ -51291,8 +51256,8 @@
         </p:nvSpPr>
         <p:spPr>
           <a:xfrm>
-            <a:off x="5029200" y="6473952"/>
-            <a:ext cx="6793992" cy="292608"/>
+            <a:off x="4663440" y="6473952"/>
+            <a:ext cx="7159752" cy="292608"/>
           </a:xfrm>
           <a:prstGeom prst="rect">
             <a:avLst/>
@@ -52332,7 +52297,7 @@
         <p:spPr>
           <a:xfrm>
             <a:off x="365760" y="6473952"/>
-            <a:ext cx="7772400" cy="292608"/>
+            <a:ext cx="4206240" cy="292608"/>
           </a:xfrm>
           <a:prstGeom prst="rect">
             <a:avLst/>
@@ -52353,7 +52318,7 @@
                 </a:solidFill>
                 <a:latin typeface="Calibri"/>
               </a:rPr>
-              <a:t>AURIS  ·  Yapay Zekâ Üretimli Müzik Tespiti</a:t>
+              <a:t>AURIS · YZ Üretimli Müzik Tespiti</a:t>
             </a:r>
           </a:p>
         </p:txBody>
@@ -52366,8 +52331,8 @@
         </p:nvSpPr>
         <p:spPr>
           <a:xfrm>
-            <a:off x="5029200" y="6473952"/>
-            <a:ext cx="6793992" cy="292608"/>
+            <a:off x="4663440" y="6473952"/>
+            <a:ext cx="7159752" cy="292608"/>
           </a:xfrm>
           <a:prstGeom prst="rect">
             <a:avLst/>
@@ -53341,7 +53306,7 @@
         <p:spPr>
           <a:xfrm>
             <a:off x="365760" y="6473952"/>
-            <a:ext cx="7772400" cy="292608"/>
+            <a:ext cx="4206240" cy="292608"/>
           </a:xfrm>
           <a:prstGeom prst="rect">
             <a:avLst/>
@@ -53362,7 +53327,7 @@
                 </a:solidFill>
                 <a:latin typeface="Calibri"/>
               </a:rPr>
-              <a:t>AURIS  ·  Yapay Zekâ Üretimli Müzik Tespiti</a:t>
+              <a:t>AURIS · YZ Üretimli Müzik Tespiti</a:t>
             </a:r>
           </a:p>
         </p:txBody>
@@ -53375,8 +53340,8 @@
         </p:nvSpPr>
         <p:spPr>
           <a:xfrm>
-            <a:off x="5029200" y="6473952"/>
-            <a:ext cx="6793992" cy="292608"/>
+            <a:off x="4663440" y="6473952"/>
+            <a:ext cx="7159752" cy="292608"/>
           </a:xfrm>
           <a:prstGeom prst="rect">
             <a:avLst/>
@@ -56673,7 +56638,7 @@
         <p:spPr>
           <a:xfrm>
             <a:off x="365760" y="6473952"/>
-            <a:ext cx="7772400" cy="292608"/>
+            <a:ext cx="4206240" cy="292608"/>
           </a:xfrm>
           <a:prstGeom prst="rect">
             <a:avLst/>
@@ -56694,7 +56659,7 @@
                 </a:solidFill>
                 <a:latin typeface="Calibri"/>
               </a:rPr>
-              <a:t>AURIS  ·  Yapay Zekâ Üretimli Müzik Tespiti</a:t>
+              <a:t>AURIS · YZ Üretimli Müzik Tespiti</a:t>
             </a:r>
           </a:p>
         </p:txBody>
@@ -56707,8 +56672,8 @@
         </p:nvSpPr>
         <p:spPr>
           <a:xfrm>
-            <a:off x="5029200" y="6473952"/>
-            <a:ext cx="6793992" cy="292608"/>
+            <a:off x="4663440" y="6473952"/>
+            <a:ext cx="7159752" cy="292608"/>
           </a:xfrm>
           <a:prstGeom prst="rect">
             <a:avLst/>
@@ -58013,7 +57978,7 @@
         <p:spPr>
           <a:xfrm>
             <a:off x="365760" y="6473952"/>
-            <a:ext cx="7772400" cy="292608"/>
+            <a:ext cx="4206240" cy="292608"/>
           </a:xfrm>
           <a:prstGeom prst="rect">
             <a:avLst/>
@@ -58034,7 +57999,7 @@
                 </a:solidFill>
                 <a:latin typeface="Calibri"/>
               </a:rPr>
-              <a:t>AURIS  ·  Yapay Zekâ Üretimli Müzik Tespiti</a:t>
+              <a:t>AURIS · YZ Üretimli Müzik Tespiti</a:t>
             </a:r>
           </a:p>
         </p:txBody>
@@ -58047,8 +58012,8 @@
         </p:nvSpPr>
         <p:spPr>
           <a:xfrm>
-            <a:off x="5029200" y="6473952"/>
-            <a:ext cx="6793992" cy="292608"/>
+            <a:off x="4663440" y="6473952"/>
+            <a:ext cx="7159752" cy="292608"/>
           </a:xfrm>
           <a:prstGeom prst="rect">
             <a:avLst/>
@@ -59330,7 +59295,7 @@
         <p:spPr>
           <a:xfrm>
             <a:off x="365760" y="6473952"/>
-            <a:ext cx="7772400" cy="292608"/>
+            <a:ext cx="4206240" cy="292608"/>
           </a:xfrm>
           <a:prstGeom prst="rect">
             <a:avLst/>
@@ -59351,7 +59316,7 @@
                 </a:solidFill>
                 <a:latin typeface="Calibri"/>
               </a:rPr>
-              <a:t>AURIS  ·  Yapay Zekâ Üretimli Müzik Tespiti</a:t>
+              <a:t>AURIS · YZ Üretimli Müzik Tespiti</a:t>
             </a:r>
           </a:p>
         </p:txBody>
@@ -59364,8 +59329,8 @@
         </p:nvSpPr>
         <p:spPr>
           <a:xfrm>
-            <a:off x="5029200" y="6473952"/>
-            <a:ext cx="6793992" cy="292608"/>
+            <a:off x="4663440" y="6473952"/>
+            <a:ext cx="7159752" cy="292608"/>
           </a:xfrm>
           <a:prstGeom prst="rect">
             <a:avLst/>
@@ -60287,7 +60252,7 @@
         <p:spPr>
           <a:xfrm>
             <a:off x="365760" y="6473952"/>
-            <a:ext cx="7772400" cy="292608"/>
+            <a:ext cx="4206240" cy="292608"/>
           </a:xfrm>
           <a:prstGeom prst="rect">
             <a:avLst/>
@@ -60308,7 +60273,7 @@
                 </a:solidFill>
                 <a:latin typeface="Calibri"/>
               </a:rPr>
-              <a:t>AURIS  ·  Yapay Zekâ Üretimli Müzik Tespiti</a:t>
+              <a:t>AURIS · YZ Üretimli Müzik Tespiti</a:t>
             </a:r>
           </a:p>
         </p:txBody>
@@ -60321,8 +60286,8 @@
         </p:nvSpPr>
         <p:spPr>
           <a:xfrm>
-            <a:off x="5029200" y="6473952"/>
-            <a:ext cx="6793992" cy="292608"/>
+            <a:off x="4663440" y="6473952"/>
+            <a:ext cx="7159752" cy="292608"/>
           </a:xfrm>
           <a:prstGeom prst="rect">
             <a:avLst/>
@@ -60505,118 +60470,6 @@
           <a:solidFill>
             <a:srgbClr val="081B33"/>
           </a:solidFill>
-          <a:ln>
-            <a:noFill/>
-          </a:ln>
-          <a:effectLst/>
-        </p:spPr>
-        <p:style>
-          <a:lnRef idx="1">
-            <a:schemeClr val="accent1"/>
-          </a:lnRef>
-          <a:fillRef idx="3">
-            <a:schemeClr val="accent1"/>
-          </a:fillRef>
-          <a:effectRef idx="2">
-            <a:schemeClr val="accent1"/>
-          </a:effectRef>
-          <a:fontRef idx="minor">
-            <a:schemeClr val="lt1"/>
-          </a:fontRef>
-        </p:style>
-        <p:txBody>
-          <a:bodyPr rtlCol="0" anchor="ctr"/>
-          <a:lstStyle/>
-          <a:p>
-            <a:pPr algn="ctr"/>
-          </a:p>
-        </p:txBody>
-      </p:sp>
-      <p:sp>
-        <p:nvSpPr>
-          <p:cNvPr id="6" name="TextBox 5"/>
-          <p:cNvSpPr txBox="1"/>
-          <p:nvPr/>
-        </p:nvSpPr>
-        <p:spPr>
-          <a:xfrm>
-            <a:off x="1051560" y="3333902"/>
-            <a:ext cx="2240280" cy="640080"/>
-          </a:xfrm>
-          <a:prstGeom prst="rect">
-            <a:avLst/>
-          </a:prstGeom>
-          <a:noFill/>
-        </p:spPr>
-        <p:txBody>
-          <a:bodyPr wrap="square" anchor="ctr" lIns="25400" rIns="25400" tIns="12700" bIns="12700">
-            <a:spAutoFit/>
-          </a:bodyPr>
-          <a:lstStyle/>
-          <a:p>
-            <a:pPr algn="ctr"/>
-            <a:r>
-              <a:rPr sz="2600" b="1" i="0">
-                <a:solidFill>
-                  <a:srgbClr val="D99A07"/>
-                </a:solidFill>
-                <a:latin typeface="Calibri"/>
-              </a:rPr>
-              <a:t>0,9548</a:t>
-            </a:r>
-          </a:p>
-        </p:txBody>
-      </p:sp>
-      <p:sp>
-        <p:nvSpPr>
-          <p:cNvPr id="7" name="TextBox 6"/>
-          <p:cNvSpPr txBox="1"/>
-          <p:nvPr/>
-        </p:nvSpPr>
-        <p:spPr>
-          <a:xfrm>
-            <a:off x="1051560" y="3961180"/>
-            <a:ext cx="2240280" cy="435254"/>
-          </a:xfrm>
-          <a:prstGeom prst="rect">
-            <a:avLst/>
-          </a:prstGeom>
-          <a:noFill/>
-        </p:spPr>
-        <p:txBody>
-          <a:bodyPr wrap="square" anchor="ctr" lIns="25400" rIns="25400" tIns="12700" bIns="12700">
-            <a:spAutoFit/>
-          </a:bodyPr>
-          <a:lstStyle/>
-          <a:p>
-            <a:pPr algn="ctr"/>
-            <a:r>
-              <a:rPr sz="1100" b="0" i="0">
-                <a:solidFill>
-                  <a:srgbClr val="FFFFFF"/>
-                </a:solidFill>
-                <a:latin typeface="Calibri"/>
-              </a:rPr>
-              <a:t>ROC-AUC</a:t>
-            </a:r>
-          </a:p>
-        </p:txBody>
-      </p:sp>
-      <p:sp>
-        <p:nvSpPr>
-          <p:cNvPr id="8" name="Rectangle 7"/>
-          <p:cNvSpPr/>
-          <p:nvPr/>
-        </p:nvSpPr>
-        <p:spPr>
-          <a:xfrm>
-            <a:off x="1051560" y="3154680"/>
-            <a:ext cx="2240280" cy="1280160"/>
-          </a:xfrm>
-          <a:prstGeom prst="rect">
-            <a:avLst/>
-          </a:prstGeom>
-          <a:noFill/>
           <a:ln w="12700">
             <a:solidFill>
               <a:srgbClr val="0A808C"/>
@@ -60648,22 +60501,22 @@
       </p:sp>
       <p:sp>
         <p:nvSpPr>
-          <p:cNvPr id="9" name="TextBox 8"/>
-          <p:cNvSpPr txBox="1"/>
-          <p:nvPr/>
-        </p:nvSpPr>
-        <p:spPr>
-          <a:xfrm>
-            <a:off x="1051560" y="3218688"/>
-            <a:ext cx="2240280" cy="640080"/>
-          </a:xfrm>
-          <a:prstGeom prst="rect">
-            <a:avLst/>
-          </a:prstGeom>
-          <a:noFill/>
-        </p:spPr>
-        <p:txBody>
-          <a:bodyPr wrap="square" anchor="t" lIns="25400" rIns="25400" tIns="12700" bIns="12700">
+          <p:cNvPr id="6" name="TextBox 5"/>
+          <p:cNvSpPr txBox="1"/>
+          <p:nvPr/>
+        </p:nvSpPr>
+        <p:spPr>
+          <a:xfrm>
+            <a:off x="1051560" y="3246120"/>
+            <a:ext cx="2240280" cy="594360"/>
+          </a:xfrm>
+          <a:prstGeom prst="rect">
+            <a:avLst/>
+          </a:prstGeom>
+          <a:noFill/>
+        </p:spPr>
+        <p:txBody>
+          <a:bodyPr wrap="square" anchor="ctr" lIns="25400" rIns="25400" tIns="12700" bIns="12700">
             <a:spAutoFit/>
           </a:bodyPr>
           <a:lstStyle/>
@@ -60683,13 +60536,13 @@
       </p:sp>
       <p:sp>
         <p:nvSpPr>
-          <p:cNvPr id="10" name="TextBox 9"/>
-          <p:cNvSpPr txBox="1"/>
-          <p:nvPr/>
-        </p:nvSpPr>
-        <p:spPr>
-          <a:xfrm>
-            <a:off x="1051560" y="3840480"/>
+          <p:cNvPr id="7" name="TextBox 6"/>
+          <p:cNvSpPr txBox="1"/>
+          <p:nvPr/>
+        </p:nvSpPr>
+        <p:spPr>
+          <a:xfrm>
+            <a:off x="1051560" y="3822191"/>
             <a:ext cx="2240280" cy="457200"/>
           </a:xfrm>
           <a:prstGeom prst="rect">
@@ -60698,7 +60551,7 @@
           <a:noFill/>
         </p:spPr>
         <p:txBody>
-          <a:bodyPr wrap="square" anchor="t" lIns="25400" rIns="25400" tIns="12700" bIns="12700">
+          <a:bodyPr wrap="square" anchor="ctr" lIns="25400" rIns="25400" tIns="12700" bIns="12700">
             <a:spAutoFit/>
           </a:bodyPr>
           <a:lstStyle/>
@@ -60718,7 +60571,7 @@
       </p:sp>
       <p:sp>
         <p:nvSpPr>
-          <p:cNvPr id="11" name="Rectangle 10"/>
+          <p:cNvPr id="8" name="Rectangle 7"/>
           <p:cNvSpPr/>
           <p:nvPr/>
         </p:nvSpPr>
@@ -60733,118 +60586,6 @@
           <a:solidFill>
             <a:srgbClr val="081B33"/>
           </a:solidFill>
-          <a:ln>
-            <a:noFill/>
-          </a:ln>
-          <a:effectLst/>
-        </p:spPr>
-        <p:style>
-          <a:lnRef idx="1">
-            <a:schemeClr val="accent1"/>
-          </a:lnRef>
-          <a:fillRef idx="3">
-            <a:schemeClr val="accent1"/>
-          </a:fillRef>
-          <a:effectRef idx="2">
-            <a:schemeClr val="accent1"/>
-          </a:effectRef>
-          <a:fontRef idx="minor">
-            <a:schemeClr val="lt1"/>
-          </a:fontRef>
-        </p:style>
-        <p:txBody>
-          <a:bodyPr rtlCol="0" anchor="ctr"/>
-          <a:lstStyle/>
-          <a:p>
-            <a:pPr algn="ctr"/>
-          </a:p>
-        </p:txBody>
-      </p:sp>
-      <p:sp>
-        <p:nvSpPr>
-          <p:cNvPr id="12" name="TextBox 11"/>
-          <p:cNvSpPr txBox="1"/>
-          <p:nvPr/>
-        </p:nvSpPr>
-        <p:spPr>
-          <a:xfrm>
-            <a:off x="3593591" y="3333902"/>
-            <a:ext cx="2240280" cy="640080"/>
-          </a:xfrm>
-          <a:prstGeom prst="rect">
-            <a:avLst/>
-          </a:prstGeom>
-          <a:noFill/>
-        </p:spPr>
-        <p:txBody>
-          <a:bodyPr wrap="square" anchor="ctr" lIns="25400" rIns="25400" tIns="12700" bIns="12700">
-            <a:spAutoFit/>
-          </a:bodyPr>
-          <a:lstStyle/>
-          <a:p>
-            <a:pPr algn="ctr"/>
-            <a:r>
-              <a:rPr sz="2600" b="1" i="0">
-                <a:solidFill>
-                  <a:srgbClr val="D99A07"/>
-                </a:solidFill>
-                <a:latin typeface="Calibri"/>
-              </a:rPr>
-              <a:t>47</a:t>
-            </a:r>
-          </a:p>
-        </p:txBody>
-      </p:sp>
-      <p:sp>
-        <p:nvSpPr>
-          <p:cNvPr id="13" name="TextBox 12"/>
-          <p:cNvSpPr txBox="1"/>
-          <p:nvPr/>
-        </p:nvSpPr>
-        <p:spPr>
-          <a:xfrm>
-            <a:off x="3593591" y="3961180"/>
-            <a:ext cx="2240280" cy="435254"/>
-          </a:xfrm>
-          <a:prstGeom prst="rect">
-            <a:avLst/>
-          </a:prstGeom>
-          <a:noFill/>
-        </p:spPr>
-        <p:txBody>
-          <a:bodyPr wrap="square" anchor="ctr" lIns="25400" rIns="25400" tIns="12700" bIns="12700">
-            <a:spAutoFit/>
-          </a:bodyPr>
-          <a:lstStyle/>
-          <a:p>
-            <a:pPr algn="ctr"/>
-            <a:r>
-              <a:rPr sz="1100" b="0" i="0">
-                <a:solidFill>
-                  <a:srgbClr val="FFFFFF"/>
-                </a:solidFill>
-                <a:latin typeface="Calibri"/>
-              </a:rPr>
-              <a:t>Öznitelik</a:t>
-            </a:r>
-          </a:p>
-        </p:txBody>
-      </p:sp>
-      <p:sp>
-        <p:nvSpPr>
-          <p:cNvPr id="14" name="Rectangle 13"/>
-          <p:cNvSpPr/>
-          <p:nvPr/>
-        </p:nvSpPr>
-        <p:spPr>
-          <a:xfrm>
-            <a:off x="3593591" y="3154680"/>
-            <a:ext cx="2240280" cy="1280160"/>
-          </a:xfrm>
-          <a:prstGeom prst="rect">
-            <a:avLst/>
-          </a:prstGeom>
-          <a:noFill/>
           <a:ln w="12700">
             <a:solidFill>
               <a:srgbClr val="0A808C"/>
@@ -60876,22 +60617,22 @@
       </p:sp>
       <p:sp>
         <p:nvSpPr>
-          <p:cNvPr id="15" name="TextBox 14"/>
-          <p:cNvSpPr txBox="1"/>
-          <p:nvPr/>
-        </p:nvSpPr>
-        <p:spPr>
-          <a:xfrm>
-            <a:off x="3593591" y="3218688"/>
-            <a:ext cx="2240280" cy="640080"/>
-          </a:xfrm>
-          <a:prstGeom prst="rect">
-            <a:avLst/>
-          </a:prstGeom>
-          <a:noFill/>
-        </p:spPr>
-        <p:txBody>
-          <a:bodyPr wrap="square" anchor="t" lIns="25400" rIns="25400" tIns="12700" bIns="12700">
+          <p:cNvPr id="9" name="TextBox 8"/>
+          <p:cNvSpPr txBox="1"/>
+          <p:nvPr/>
+        </p:nvSpPr>
+        <p:spPr>
+          <a:xfrm>
+            <a:off x="3593591" y="3246120"/>
+            <a:ext cx="2240280" cy="594360"/>
+          </a:xfrm>
+          <a:prstGeom prst="rect">
+            <a:avLst/>
+          </a:prstGeom>
+          <a:noFill/>
+        </p:spPr>
+        <p:txBody>
+          <a:bodyPr wrap="square" anchor="ctr" lIns="25400" rIns="25400" tIns="12700" bIns="12700">
             <a:spAutoFit/>
           </a:bodyPr>
           <a:lstStyle/>
@@ -60911,13 +60652,13 @@
       </p:sp>
       <p:sp>
         <p:nvSpPr>
-          <p:cNvPr id="16" name="TextBox 15"/>
-          <p:cNvSpPr txBox="1"/>
-          <p:nvPr/>
-        </p:nvSpPr>
-        <p:spPr>
-          <a:xfrm>
-            <a:off x="3593591" y="3840480"/>
+          <p:cNvPr id="10" name="TextBox 9"/>
+          <p:cNvSpPr txBox="1"/>
+          <p:nvPr/>
+        </p:nvSpPr>
+        <p:spPr>
+          <a:xfrm>
+            <a:off x="3593591" y="3822191"/>
             <a:ext cx="2240280" cy="457200"/>
           </a:xfrm>
           <a:prstGeom prst="rect">
@@ -60926,7 +60667,7 @@
           <a:noFill/>
         </p:spPr>
         <p:txBody>
-          <a:bodyPr wrap="square" anchor="t" lIns="25400" rIns="25400" tIns="12700" bIns="12700">
+          <a:bodyPr wrap="square" anchor="ctr" lIns="25400" rIns="25400" tIns="12700" bIns="12700">
             <a:spAutoFit/>
           </a:bodyPr>
           <a:lstStyle/>
@@ -60946,7 +60687,7 @@
       </p:sp>
       <p:sp>
         <p:nvSpPr>
-          <p:cNvPr id="17" name="Rectangle 16"/>
+          <p:cNvPr id="11" name="Rectangle 10"/>
           <p:cNvSpPr/>
           <p:nvPr/>
         </p:nvSpPr>
@@ -60961,118 +60702,6 @@
           <a:solidFill>
             <a:srgbClr val="081B33"/>
           </a:solidFill>
-          <a:ln>
-            <a:noFill/>
-          </a:ln>
-          <a:effectLst/>
-        </p:spPr>
-        <p:style>
-          <a:lnRef idx="1">
-            <a:schemeClr val="accent1"/>
-          </a:lnRef>
-          <a:fillRef idx="3">
-            <a:schemeClr val="accent1"/>
-          </a:fillRef>
-          <a:effectRef idx="2">
-            <a:schemeClr val="accent1"/>
-          </a:effectRef>
-          <a:fontRef idx="minor">
-            <a:schemeClr val="lt1"/>
-          </a:fontRef>
-        </p:style>
-        <p:txBody>
-          <a:bodyPr rtlCol="0" anchor="ctr"/>
-          <a:lstStyle/>
-          <a:p>
-            <a:pPr algn="ctr"/>
-          </a:p>
-        </p:txBody>
-      </p:sp>
-      <p:sp>
-        <p:nvSpPr>
-          <p:cNvPr id="18" name="TextBox 17"/>
-          <p:cNvSpPr txBox="1"/>
-          <p:nvPr/>
-        </p:nvSpPr>
-        <p:spPr>
-          <a:xfrm>
-            <a:off x="6135623" y="3333902"/>
-            <a:ext cx="2240280" cy="640080"/>
-          </a:xfrm>
-          <a:prstGeom prst="rect">
-            <a:avLst/>
-          </a:prstGeom>
-          <a:noFill/>
-        </p:spPr>
-        <p:txBody>
-          <a:bodyPr wrap="square" anchor="ctr" lIns="25400" rIns="25400" tIns="12700" bIns="12700">
-            <a:spAutoFit/>
-          </a:bodyPr>
-          <a:lstStyle/>
-          <a:p>
-            <a:pPr algn="ctr"/>
-            <a:r>
-              <a:rPr sz="2600" b="1" i="0">
-                <a:solidFill>
-                  <a:srgbClr val="D99A07"/>
-                </a:solidFill>
-                <a:latin typeface="Calibri"/>
-              </a:rPr>
-              <a:t>11</a:t>
-            </a:r>
-          </a:p>
-        </p:txBody>
-      </p:sp>
-      <p:sp>
-        <p:nvSpPr>
-          <p:cNvPr id="19" name="TextBox 18"/>
-          <p:cNvSpPr txBox="1"/>
-          <p:nvPr/>
-        </p:nvSpPr>
-        <p:spPr>
-          <a:xfrm>
-            <a:off x="6135623" y="3961180"/>
-            <a:ext cx="2240280" cy="435254"/>
-          </a:xfrm>
-          <a:prstGeom prst="rect">
-            <a:avLst/>
-          </a:prstGeom>
-          <a:noFill/>
-        </p:spPr>
-        <p:txBody>
-          <a:bodyPr wrap="square" anchor="ctr" lIns="25400" rIns="25400" tIns="12700" bIns="12700">
-            <a:spAutoFit/>
-          </a:bodyPr>
-          <a:lstStyle/>
-          <a:p>
-            <a:pPr algn="ctr"/>
-            <a:r>
-              <a:rPr sz="1100" b="0" i="0">
-                <a:solidFill>
-                  <a:srgbClr val="FFFFFF"/>
-                </a:solidFill>
-                <a:latin typeface="Calibri"/>
-              </a:rPr>
-              <a:t>Model</a:t>
-            </a:r>
-          </a:p>
-        </p:txBody>
-      </p:sp>
-      <p:sp>
-        <p:nvSpPr>
-          <p:cNvPr id="20" name="Rectangle 19"/>
-          <p:cNvSpPr/>
-          <p:nvPr/>
-        </p:nvSpPr>
-        <p:spPr>
-          <a:xfrm>
-            <a:off x="6135623" y="3154680"/>
-            <a:ext cx="2240280" cy="1280160"/>
-          </a:xfrm>
-          <a:prstGeom prst="rect">
-            <a:avLst/>
-          </a:prstGeom>
-          <a:noFill/>
           <a:ln w="12700">
             <a:solidFill>
               <a:srgbClr val="0A808C"/>
@@ -61104,22 +60733,22 @@
       </p:sp>
       <p:sp>
         <p:nvSpPr>
-          <p:cNvPr id="21" name="TextBox 20"/>
-          <p:cNvSpPr txBox="1"/>
-          <p:nvPr/>
-        </p:nvSpPr>
-        <p:spPr>
-          <a:xfrm>
-            <a:off x="6135623" y="3218688"/>
-            <a:ext cx="2240280" cy="640080"/>
-          </a:xfrm>
-          <a:prstGeom prst="rect">
-            <a:avLst/>
-          </a:prstGeom>
-          <a:noFill/>
-        </p:spPr>
-        <p:txBody>
-          <a:bodyPr wrap="square" anchor="t" lIns="25400" rIns="25400" tIns="12700" bIns="12700">
+          <p:cNvPr id="12" name="TextBox 11"/>
+          <p:cNvSpPr txBox="1"/>
+          <p:nvPr/>
+        </p:nvSpPr>
+        <p:spPr>
+          <a:xfrm>
+            <a:off x="6135623" y="3246120"/>
+            <a:ext cx="2240280" cy="594360"/>
+          </a:xfrm>
+          <a:prstGeom prst="rect">
+            <a:avLst/>
+          </a:prstGeom>
+          <a:noFill/>
+        </p:spPr>
+        <p:txBody>
+          <a:bodyPr wrap="square" anchor="ctr" lIns="25400" rIns="25400" tIns="12700" bIns="12700">
             <a:spAutoFit/>
           </a:bodyPr>
           <a:lstStyle/>
@@ -61139,13 +60768,13 @@
       </p:sp>
       <p:sp>
         <p:nvSpPr>
-          <p:cNvPr id="22" name="TextBox 21"/>
-          <p:cNvSpPr txBox="1"/>
-          <p:nvPr/>
-        </p:nvSpPr>
-        <p:spPr>
-          <a:xfrm>
-            <a:off x="6135623" y="3840480"/>
+          <p:cNvPr id="13" name="TextBox 12"/>
+          <p:cNvSpPr txBox="1"/>
+          <p:nvPr/>
+        </p:nvSpPr>
+        <p:spPr>
+          <a:xfrm>
+            <a:off x="6135623" y="3822191"/>
             <a:ext cx="2240280" cy="457200"/>
           </a:xfrm>
           <a:prstGeom prst="rect">
@@ -61154,7 +60783,7 @@
           <a:noFill/>
         </p:spPr>
         <p:txBody>
-          <a:bodyPr wrap="square" anchor="t" lIns="25400" rIns="25400" tIns="12700" bIns="12700">
+          <a:bodyPr wrap="square" anchor="ctr" lIns="25400" rIns="25400" tIns="12700" bIns="12700">
             <a:spAutoFit/>
           </a:bodyPr>
           <a:lstStyle/>
@@ -61174,7 +60803,7 @@
       </p:sp>
       <p:sp>
         <p:nvSpPr>
-          <p:cNvPr id="23" name="Rectangle 22"/>
+          <p:cNvPr id="14" name="Rectangle 13"/>
           <p:cNvSpPr/>
           <p:nvPr/>
         </p:nvSpPr>
@@ -61189,118 +60818,6 @@
           <a:solidFill>
             <a:srgbClr val="081B33"/>
           </a:solidFill>
-          <a:ln>
-            <a:noFill/>
-          </a:ln>
-          <a:effectLst/>
-        </p:spPr>
-        <p:style>
-          <a:lnRef idx="1">
-            <a:schemeClr val="accent1"/>
-          </a:lnRef>
-          <a:fillRef idx="3">
-            <a:schemeClr val="accent1"/>
-          </a:fillRef>
-          <a:effectRef idx="2">
-            <a:schemeClr val="accent1"/>
-          </a:effectRef>
-          <a:fontRef idx="minor">
-            <a:schemeClr val="lt1"/>
-          </a:fontRef>
-        </p:style>
-        <p:txBody>
-          <a:bodyPr rtlCol="0" anchor="ctr"/>
-          <a:lstStyle/>
-          <a:p>
-            <a:pPr algn="ctr"/>
-          </a:p>
-        </p:txBody>
-      </p:sp>
-      <p:sp>
-        <p:nvSpPr>
-          <p:cNvPr id="24" name="TextBox 23"/>
-          <p:cNvSpPr txBox="1"/>
-          <p:nvPr/>
-        </p:nvSpPr>
-        <p:spPr>
-          <a:xfrm>
-            <a:off x="8677656" y="3333902"/>
-            <a:ext cx="2240280" cy="640080"/>
-          </a:xfrm>
-          <a:prstGeom prst="rect">
-            <a:avLst/>
-          </a:prstGeom>
-          <a:noFill/>
-        </p:spPr>
-        <p:txBody>
-          <a:bodyPr wrap="square" anchor="ctr" lIns="25400" rIns="25400" tIns="12700" bIns="12700">
-            <a:spAutoFit/>
-          </a:bodyPr>
-          <a:lstStyle/>
-          <a:p>
-            <a:pPr algn="ctr"/>
-            <a:r>
-              <a:rPr sz="2600" b="1" i="0">
-                <a:solidFill>
-                  <a:srgbClr val="D99A07"/>
-                </a:solidFill>
-                <a:latin typeface="Calibri"/>
-              </a:rPr>
-              <a:t>5.195</a:t>
-            </a:r>
-          </a:p>
-        </p:txBody>
-      </p:sp>
-      <p:sp>
-        <p:nvSpPr>
-          <p:cNvPr id="25" name="TextBox 24"/>
-          <p:cNvSpPr txBox="1"/>
-          <p:nvPr/>
-        </p:nvSpPr>
-        <p:spPr>
-          <a:xfrm>
-            <a:off x="8677656" y="3961180"/>
-            <a:ext cx="2240280" cy="435254"/>
-          </a:xfrm>
-          <a:prstGeom prst="rect">
-            <a:avLst/>
-          </a:prstGeom>
-          <a:noFill/>
-        </p:spPr>
-        <p:txBody>
-          <a:bodyPr wrap="square" anchor="ctr" lIns="25400" rIns="25400" tIns="12700" bIns="12700">
-            <a:spAutoFit/>
-          </a:bodyPr>
-          <a:lstStyle/>
-          <a:p>
-            <a:pPr algn="ctr"/>
-            <a:r>
-              <a:rPr sz="1100" b="0" i="0">
-                <a:solidFill>
-                  <a:srgbClr val="FFFFFF"/>
-                </a:solidFill>
-                <a:latin typeface="Calibri"/>
-              </a:rPr>
-              <a:t>Örnek</a:t>
-            </a:r>
-          </a:p>
-        </p:txBody>
-      </p:sp>
-      <p:sp>
-        <p:nvSpPr>
-          <p:cNvPr id="26" name="Rectangle 25"/>
-          <p:cNvSpPr/>
-          <p:nvPr/>
-        </p:nvSpPr>
-        <p:spPr>
-          <a:xfrm>
-            <a:off x="8677656" y="3154680"/>
-            <a:ext cx="2240280" cy="1280160"/>
-          </a:xfrm>
-          <a:prstGeom prst="rect">
-            <a:avLst/>
-          </a:prstGeom>
-          <a:noFill/>
           <a:ln w="12700">
             <a:solidFill>
               <a:srgbClr val="0A808C"/>
@@ -61332,22 +60849,22 @@
       </p:sp>
       <p:sp>
         <p:nvSpPr>
-          <p:cNvPr id="27" name="TextBox 26"/>
-          <p:cNvSpPr txBox="1"/>
-          <p:nvPr/>
-        </p:nvSpPr>
-        <p:spPr>
-          <a:xfrm>
-            <a:off x="8677656" y="3218688"/>
-            <a:ext cx="2240280" cy="640080"/>
-          </a:xfrm>
-          <a:prstGeom prst="rect">
-            <a:avLst/>
-          </a:prstGeom>
-          <a:noFill/>
-        </p:spPr>
-        <p:txBody>
-          <a:bodyPr wrap="square" anchor="t" lIns="25400" rIns="25400" tIns="12700" bIns="12700">
+          <p:cNvPr id="15" name="TextBox 14"/>
+          <p:cNvSpPr txBox="1"/>
+          <p:nvPr/>
+        </p:nvSpPr>
+        <p:spPr>
+          <a:xfrm>
+            <a:off x="8677656" y="3246120"/>
+            <a:ext cx="2240280" cy="594360"/>
+          </a:xfrm>
+          <a:prstGeom prst="rect">
+            <a:avLst/>
+          </a:prstGeom>
+          <a:noFill/>
+        </p:spPr>
+        <p:txBody>
+          <a:bodyPr wrap="square" anchor="ctr" lIns="25400" rIns="25400" tIns="12700" bIns="12700">
             <a:spAutoFit/>
           </a:bodyPr>
           <a:lstStyle/>
@@ -61367,13 +60884,13 @@
       </p:sp>
       <p:sp>
         <p:nvSpPr>
-          <p:cNvPr id="28" name="TextBox 27"/>
-          <p:cNvSpPr txBox="1"/>
-          <p:nvPr/>
-        </p:nvSpPr>
-        <p:spPr>
-          <a:xfrm>
-            <a:off x="8677656" y="3840480"/>
+          <p:cNvPr id="16" name="TextBox 15"/>
+          <p:cNvSpPr txBox="1"/>
+          <p:nvPr/>
+        </p:nvSpPr>
+        <p:spPr>
+          <a:xfrm>
+            <a:off x="8677656" y="3822191"/>
             <a:ext cx="2240280" cy="457200"/>
           </a:xfrm>
           <a:prstGeom prst="rect">
@@ -61382,7 +60899,7 @@
           <a:noFill/>
         </p:spPr>
         <p:txBody>
-          <a:bodyPr wrap="square" anchor="t" lIns="25400" rIns="25400" tIns="12700" bIns="12700">
+          <a:bodyPr wrap="square" anchor="ctr" lIns="25400" rIns="25400" tIns="12700" bIns="12700">
             <a:spAutoFit/>
           </a:bodyPr>
           <a:lstStyle/>
@@ -61402,7 +60919,7 @@
       </p:sp>
       <p:sp>
         <p:nvSpPr>
-          <p:cNvPr id="29" name="TextBox 28"/>
+          <p:cNvPr id="17" name="TextBox 16"/>
           <p:cNvSpPr txBox="1"/>
           <p:nvPr/>
         </p:nvSpPr>
@@ -61437,7 +60954,7 @@
       </p:sp>
       <p:sp>
         <p:nvSpPr>
-          <p:cNvPr id="30" name="TextBox 29"/>
+          <p:cNvPr id="18" name="TextBox 17"/>
           <p:cNvSpPr txBox="1"/>
           <p:nvPr/>
         </p:nvSpPr>
@@ -63899,7 +63416,7 @@
         <p:spPr>
           <a:xfrm>
             <a:off x="365760" y="6473952"/>
-            <a:ext cx="7772400" cy="292608"/>
+            <a:ext cx="4206240" cy="292608"/>
           </a:xfrm>
           <a:prstGeom prst="rect">
             <a:avLst/>
@@ -63920,7 +63437,7 @@
                 </a:solidFill>
                 <a:latin typeface="Calibri"/>
               </a:rPr>
-              <a:t>AURIS  ·  Yapay Zekâ Üretimli Müzik Tespiti</a:t>
+              <a:t>AURIS · YZ Üretimli Müzik Tespiti</a:t>
             </a:r>
           </a:p>
         </p:txBody>
@@ -63933,8 +63450,8 @@
         </p:nvSpPr>
         <p:spPr>
           <a:xfrm>
-            <a:off x="5029200" y="6473952"/>
-            <a:ext cx="6793992" cy="292608"/>
+            <a:off x="4663440" y="6473952"/>
+            <a:ext cx="7159752" cy="292608"/>
           </a:xfrm>
           <a:prstGeom prst="rect">
             <a:avLst/>
@@ -65901,7 +65418,7 @@
         <p:spPr>
           <a:xfrm>
             <a:off x="365760" y="6473952"/>
-            <a:ext cx="7772400" cy="292608"/>
+            <a:ext cx="4206240" cy="292608"/>
           </a:xfrm>
           <a:prstGeom prst="rect">
             <a:avLst/>
@@ -65922,7 +65439,7 @@
                 </a:solidFill>
                 <a:latin typeface="Calibri"/>
               </a:rPr>
-              <a:t>AURIS  ·  Yapay Zekâ Üretimli Müzik Tespiti</a:t>
+              <a:t>AURIS · YZ Üretimli Müzik Tespiti</a:t>
             </a:r>
           </a:p>
         </p:txBody>
@@ -65935,8 +65452,8 @@
         </p:nvSpPr>
         <p:spPr>
           <a:xfrm>
-            <a:off x="5029200" y="6473952"/>
-            <a:ext cx="6793992" cy="292608"/>
+            <a:off x="4663440" y="6473952"/>
+            <a:ext cx="7159752" cy="292608"/>
           </a:xfrm>
           <a:prstGeom prst="rect">
             <a:avLst/>
@@ -68573,7 +68090,7 @@
         <p:spPr>
           <a:xfrm>
             <a:off x="365760" y="6473952"/>
-            <a:ext cx="7772400" cy="292608"/>
+            <a:ext cx="4206240" cy="292608"/>
           </a:xfrm>
           <a:prstGeom prst="rect">
             <a:avLst/>
@@ -68594,7 +68111,7 @@
                 </a:solidFill>
                 <a:latin typeface="Calibri"/>
               </a:rPr>
-              <a:t>AURIS  ·  Yapay Zekâ Üretimli Müzik Tespiti</a:t>
+              <a:t>AURIS · YZ Üretimli Müzik Tespiti</a:t>
             </a:r>
           </a:p>
         </p:txBody>
@@ -68607,8 +68124,8 @@
         </p:nvSpPr>
         <p:spPr>
           <a:xfrm>
-            <a:off x="5029200" y="6473952"/>
-            <a:ext cx="6793992" cy="292608"/>
+            <a:off x="4663440" y="6473952"/>
+            <a:ext cx="7159752" cy="292608"/>
           </a:xfrm>
           <a:prstGeom prst="rect">
             <a:avLst/>
